--- a/docs/seminar/seminar_20260806.pptx
+++ b/docs/seminar/seminar_20260806.pptx
@@ -24,9 +24,10 @@
     <p:sldId id="272" r:id="rId18"/>
     <p:sldId id="273" r:id="rId19"/>
     <p:sldId id="274" r:id="rId20"/>
+    <p:sldId id="275" r:id="rId21"/>
   </p:sldIdLst>
   <p:notesMasterIdLst>
-    <p:notesMasterId r:id="rId21"/>
+    <p:notesMasterId r:id="rId22"/>
   </p:notesMasterIdLst>
   <p:sldSz cx="9144000" cy="5143500"/>
   <p:notesSz cx="5143500" cy="9144000"/>
@@ -1701,6 +1702,369 @@
         </a:p>
       </c:txPr>
     </c:legend>
+    <c:plotVisOnly val="1"/>
+    <c:dispBlanksAs val="span"/>
+  </c:chart>
+  <c:spPr>
+    <a:noFill/>
+    <a:ln>
+      <a:noFill/>
+    </a:ln>
+    <a:effectLst/>
+  </c:spPr>
+  <c:externalData r:id="rId1">
+    <c:autoUpdate val="0"/>
+  </c:externalData>
+</c:chartSpace>
+</file>
+
+<file path=ppt/charts/chart5.xml><?xml version="1.0" encoding="utf-8"?>
+<c:chartSpace xmlns:c="http://schemas.openxmlformats.org/drawingml/2006/chart" xmlns:a="http://schemas.openxmlformats.org/drawingml/2006/main" xmlns:r="http://schemas.openxmlformats.org/officeDocument/2006/relationships">
+  <c:date1904 val="0"/>
+  <c:roundedCorners val="1"/>
+  <c:chart>
+    <c:title>
+      <c:tx>
+        <c:rich>
+          <a:bodyPr/>
+          <a:lstStyle/>
+          <a:p>
+            <a:pPr>
+              <a:defRPr sz="1050" b="0" i="0" u="none" strike="noStrike">
+                <a:solidFill>
+                  <a:srgbClr val="1F4E79"/>
+                </a:solidFill>
+                <a:latin typeface="Arial"/>
+              </a:defRPr>
+            </a:pPr>
+            <a:r>
+              <a:rPr sz="1050" b="0" i="0" u="none" strike="noStrike">
+                <a:solidFill>
+                  <a:srgbClr val="1F4E79"/>
+                </a:solidFill>
+                <a:latin typeface="Arial"/>
+              </a:rPr>
+              <a:t>One geometric descriptor collapses the composition effect</a:t>
+            </a:r>
+          </a:p>
+        </c:rich>
+      </c:tx>
+      <c:layout/>
+      <c:overlay val="0"/>
+    </c:title>
+    <c:autoTitleDeleted val="0"/>
+    <c:plotArea>
+      <c:layout/>
+      <c:lineChart>
+        <c:varyColors val="0"/>
+        <c:ser>
+          <c:idx val="0"/>
+          <c:order val="0"/>
+          <c:tx>
+            <c:strRef>
+              <c:f>Sheet1!$B$1</c:f>
+              <c:strCache>
+                <c:ptCount val="1"/>
+                <c:pt idx="0">
+                  <c:v>sigma at phi = 0.72</c:v>
+                </c:pt>
+              </c:strCache>
+            </c:strRef>
+          </c:tx>
+          <c:spPr>
+            <a:solidFill>
+              <a:srgbClr val="1F4E79"/>
+            </a:solidFill>
+            <a:ln w="31750" cap="flat">
+              <a:solidFill>
+                <a:srgbClr val="1F4E79"/>
+              </a:solidFill>
+              <a:prstDash val="solid"/>
+              <a:round/>
+            </a:ln>
+            <a:effectLst/>
+          </c:spPr>
+          <c:invertIfNegative val="0"/>
+          <c:dLbls>
+            <c:numFmt formatCode="#,##0" sourceLinked="0"/>
+            <c:txPr>
+              <a:bodyPr/>
+              <a:lstStyle/>
+              <a:p>
+                <a:pPr>
+                  <a:defRPr b="0" i="0" strike="noStrike" sz="900" u="none">
+                    <a:solidFill>
+                      <a:srgbClr val="262626"/>
+                    </a:solidFill>
+                    <a:latin typeface="Arial"/>
+                  </a:defRPr>
+                </a:pPr>
+              </a:p>
+            </c:txPr>
+            <c:dLblPos val="t"/>
+            <c:showLegendKey val="0"/>
+            <c:showVal val="1"/>
+            <c:showCatName val="0"/>
+            <c:showSerName val="0"/>
+            <c:showPercent val="0"/>
+            <c:showBubbleSize val="0"/>
+            <c:showLeaderLines val="0"/>
+          </c:dLbls>
+          <c:marker>
+            <c:symbol val="circle"/>
+            <c:size val="8"/>
+            <c:spPr>
+              <a:solidFill>
+                <a:srgbClr val="1F4E79"/>
+              </a:solidFill>
+              <a:ln w="9525" cap="flat">
+                <a:solidFill>
+                  <a:srgbClr val="1F4E79"/>
+                </a:solidFill>
+                <a:prstDash val="solid"/>
+                <a:round/>
+              </a:ln>
+              <a:effectLst/>
+            </c:spPr>
+          </c:marker>
+          <c:cat>
+            <c:multiLvlStrRef>
+              <c:f>Sheet1!$A$2:$A$6</c:f>
+              <c:multiLvlStrCache>
+                <c:ptCount val="5"/>
+                <c:lvl>
+                  <c:pt idx="0">
+                    <c:v>501</c:v>
+                  </c:pt>
+                  <c:pt idx="1">
+                    <c:v>620</c:v>
+                  </c:pt>
+                  <c:pt idx="2">
+                    <c:v>745</c:v>
+                  </c:pt>
+                  <c:pt idx="3">
+                    <c:v>916</c:v>
+                  </c:pt>
+                  <c:pt idx="4">
+                    <c:v>1458</c:v>
+                  </c:pt>
+                </c:lvl>
+              </c:multiLvlStrCache>
+            </c:multiLvlStrRef>
+          </c:cat>
+          <c:val>
+            <c:numRef>
+              <c:f>Sheet1!$B$2:$B$6</c:f>
+              <c:numCache>
+                <c:formatCode>General</c:formatCode>
+                <c:ptCount val="5"/>
+                <c:pt idx="0">
+                  <c:v>0.7001</c:v>
+                </c:pt>
+                <c:pt idx="1">
+                  <c:v>0.5457</c:v>
+                </c:pt>
+                <c:pt idx="2">
+                  <c:v>0.4921</c:v>
+                </c:pt>
+                <c:pt idx="3">
+                  <c:v>0.4671</c:v>
+                </c:pt>
+                <c:pt idx="4">
+                  <c:v>0.3743</c:v>
+                </c:pt>
+              </c:numCache>
+            </c:numRef>
+          </c:val>
+          <c:smooth val="0"/>
+        </c:ser>
+        <c:dLbls>
+          <c:numFmt formatCode="#,##0" sourceLinked="0"/>
+          <c:txPr>
+            <a:bodyPr/>
+            <a:lstStyle/>
+            <a:p>
+              <a:pPr>
+                <a:defRPr b="0" i="0" strike="noStrike" sz="900" u="none">
+                  <a:solidFill>
+                    <a:srgbClr val="262626"/>
+                  </a:solidFill>
+                  <a:latin typeface="Arial"/>
+                </a:defRPr>
+              </a:pPr>
+            </a:p>
+          </c:txPr>
+          <c:dLblPos val="t"/>
+          <c:showLegendKey val="0"/>
+          <c:showVal val="1"/>
+          <c:showCatName val="0"/>
+          <c:showSerName val="0"/>
+          <c:showPercent val="0"/>
+          <c:showBubbleSize val="0"/>
+          <c:showLeaderLines val="0"/>
+        </c:dLbls>
+        <c:marker val="1"/>
+        <c:axId val="2094734554"/>
+        <c:axId val="2094734552"/>
+        <c:axId val="2094734556"/>
+      </c:lineChart>
+      <c:catAx>
+        <c:axId val="2094734554"/>
+        <c:scaling>
+          <c:orientation val="minMax"/>
+        </c:scaling>
+        <c:delete val="0"/>
+        <c:axPos val="b"/>
+        <c:title>
+          <c:tx>
+            <c:rich>
+              <a:bodyPr/>
+              <a:lstStyle/>
+              <a:p>
+                <a:pPr>
+                  <a:defRPr sz="900" b="0" i="0" u="none" strike="noStrike">
+                    <a:solidFill>
+                      <a:srgbClr val="000000"/>
+                    </a:solidFill>
+                    <a:latin typeface="Arial"/>
+                  </a:defRPr>
+                </a:pPr>
+                <a:r>
+                  <a:rPr sz="900" b="0" i="0" u="none" strike="noStrike">
+                    <a:solidFill>
+                      <a:srgbClr val="000000"/>
+                    </a:solidFill>
+                    <a:latin typeface="Arial"/>
+                  </a:rPr>
+                  <a:t>channel width  d_h = V_free / S_AM   (nm)</a:t>
+                </a:r>
+              </a:p>
+            </c:rich>
+          </c:tx>
+          <c:layout/>
+          <c:overlay val="0"/>
+        </c:title>
+        <c:numFmt formatCode="General" sourceLinked="1"/>
+        <c:majorTickMark val="out"/>
+        <c:minorTickMark val="none"/>
+        <c:tickLblPos val="low"/>
+        <c:spPr>
+          <a:ln w="12700" cap="flat">
+            <a:solidFill>
+              <a:srgbClr val="888888"/>
+            </a:solidFill>
+            <a:prstDash val="solid"/>
+            <a:round/>
+          </a:ln>
+        </c:spPr>
+        <c:txPr>
+          <a:bodyPr/>
+          <a:lstStyle/>
+          <a:p>
+            <a:pPr>
+              <a:defRPr sz="900" b="0" i="0" u="none" strike="noStrike">
+                <a:solidFill>
+                  <a:srgbClr val="595959"/>
+                </a:solidFill>
+                <a:latin typeface="Arial"/>
+              </a:defRPr>
+            </a:pPr>
+            <a:endParaRPr lang="en-US"/>
+          </a:p>
+        </c:txPr>
+        <c:crossAx val="2094734552"/>
+        <c:crosses val="autoZero"/>
+        <c:auto val="1"/>
+        <c:lblAlgn val="ctr"/>
+        <c:noMultiLvlLbl val="1"/>
+      </c:catAx>
+      <c:valAx>
+        <c:axId val="2094734552"/>
+        <c:scaling>
+          <c:orientation val="minMax"/>
+        </c:scaling>
+        <c:delete val="0"/>
+        <c:axPos val="l"/>
+        <c:majorGridlines>
+          <c:spPr>
+            <a:ln w="6350" cap="flat">
+              <a:solidFill>
+                <a:srgbClr val="E0E0E0"/>
+              </a:solidFill>
+              <a:prstDash val="solid"/>
+              <a:round/>
+            </a:ln>
+          </c:spPr>
+        </c:majorGridlines>
+        <c:title>
+          <c:tx>
+            <c:rich>
+              <a:bodyPr/>
+              <a:lstStyle/>
+              <a:p>
+                <a:pPr>
+                  <a:defRPr sz="900" b="0" i="0" u="none" strike="noStrike">
+                    <a:solidFill>
+                      <a:srgbClr val="000000"/>
+                    </a:solidFill>
+                    <a:latin typeface="Arial"/>
+                  </a:defRPr>
+                </a:pPr>
+                <a:r>
+                  <a:rPr sz="900" b="0" i="0" u="none" strike="noStrike">
+                    <a:solidFill>
+                      <a:srgbClr val="000000"/>
+                    </a:solidFill>
+                    <a:latin typeface="Arial"/>
+                  </a:rPr>
+                  <a:t>sigma (GPa)</a:t>
+                </a:r>
+              </a:p>
+            </c:rich>
+          </c:tx>
+          <c:layout/>
+          <c:overlay val="0"/>
+        </c:title>
+        <c:numFmt formatCode="General" sourceLinked="0"/>
+        <c:majorTickMark val="out"/>
+        <c:minorTickMark val="none"/>
+        <c:tickLblPos val="nextTo"/>
+        <c:spPr>
+          <a:ln w="12700" cap="flat">
+            <a:solidFill>
+              <a:srgbClr val="888888"/>
+            </a:solidFill>
+            <a:prstDash val="solid"/>
+            <a:round/>
+          </a:ln>
+        </c:spPr>
+        <c:txPr>
+          <a:bodyPr/>
+          <a:lstStyle/>
+          <a:p>
+            <a:pPr>
+              <a:defRPr sz="900" b="0" i="0" u="none" strike="noStrike">
+                <a:solidFill>
+                  <a:srgbClr val="595959"/>
+                </a:solidFill>
+                <a:latin typeface="Arial"/>
+              </a:defRPr>
+            </a:pPr>
+            <a:endParaRPr lang="en-US"/>
+          </a:p>
+        </c:txPr>
+        <c:crossAx val="2094734554"/>
+        <c:crosses val="autoZero"/>
+        <c:crossBetween val="between"/>
+      </c:valAx>
+      <c:spPr>
+        <a:noFill/>
+        <a:ln>
+          <a:noFill/>
+        </a:ln>
+        <a:effectLst/>
+      </c:spPr>
+    </c:plotArea>
     <c:plotVisOnly val="1"/>
     <c:dispBlanksAs val="span"/>
   </c:chart>
@@ -2552,7 +2916,7 @@
           <a:p>
             <a:r>
               <a:rPr lang="en-US" dirty="0"/>
-              <a:t>먼저 말하는 게 중요합니다. 한계를 숨기면 질문에서 무너지고, 먼저 내면 대화가 됩니다.</a:t>
+              <a:t>열화의 98 % 가 화학이라는 것이 결론입니다. 접촉 2 % 는 반드시 "하한"이라고 말해야 합니다 — OTHER 가 모델 밖에 있습니다.</a:t>
             </a:r>
             <a:endParaRPr lang="en-US" dirty="0"/>
           </a:p>
@@ -2640,7 +3004,7 @@
           <a:p>
             <a:r>
               <a:rPr lang="en-US" dirty="0"/>
-              <a:t>마지막 문장이 이 발표의 결론입니다.</a:t>
+              <a:t>Q: "전이가 기각됐으면 지금까지 결과가 다 틀린 것 아니냐" — 아닙니다. 기각된 것은 곡선을 다른 전극에 옮기는 것이고, 각 전극에서 직접 계산한 값은 무관합니다. 4번은 제 사전 예상이 부호부터 틀렸던 경우입니다 — 미해상이면 뻣뻣해질 줄 알았는데 실제로는 협착이 격자에서 사라져 오히려 무릅니다. 그래서 정밀화가 효과를 키웁니다.</a:t>
             </a:r>
             <a:endParaRPr lang="en-US" dirty="0"/>
           </a:p>
@@ -2728,7 +3092,7 @@
           <a:p>
             <a:r>
               <a:rPr lang="en-US" dirty="0"/>
-              <a:t/>
+              <a:t>마지막 문장이 이 발표의 결론입니다.</a:t>
             </a:r>
             <a:endParaRPr lang="en-US" dirty="0"/>
           </a:p>
@@ -3104,6 +3468,94 @@
             <a:fld id="{F7021451-1387-4CA6-816F-3879F97B5CBC}" type="slidenum">
               <a:rPr lang="en-US"/>
               <a:t>2</a:t>
+            </a:fld>
+            <a:endParaRPr lang="en-US"/>
+          </a:p>
+        </p:txBody>
+      </p:sp>
+    </p:spTree>
+    <p:extLst>
+      <p:ext uri="{BB962C8B-B14F-4D97-AF65-F5344CB8AC3E}">
+        <p14:creationId xmlns:p14="http://schemas.microsoft.com/office/powerpoint/2010/main" val="1024086991"/>
+      </p:ext>
+    </p:extLst>
+  </p:cSld>
+  <p:clrMapOvr>
+    <a:masterClrMapping/>
+  </p:clrMapOvr>
+</p:notes>
+</file>
+
+<file path=ppt/notesSlides/notesSlide20.xml><?xml version="1.0" encoding="utf-8"?>
+<p:notes xmlns:a="http://schemas.openxmlformats.org/drawingml/2006/main" xmlns:r="http://schemas.openxmlformats.org/officeDocument/2006/relationships" xmlns:p="http://schemas.openxmlformats.org/presentationml/2006/main">
+  <p:cSld>
+    <p:spTree>
+      <p:nvGrpSpPr>
+        <p:cNvPr id="1" name=""/>
+        <p:cNvGrpSpPr/>
+        <p:nvPr/>
+      </p:nvGrpSpPr>
+      <p:grpSpPr>
+        <a:xfrm>
+          <a:off x="0" y="0"/>
+          <a:ext cx="0" cy="0"/>
+          <a:chOff x="0" y="0"/>
+          <a:chExt cx="0" cy="0"/>
+        </a:xfrm>
+      </p:grpSpPr>
+      <p:sp>
+        <p:nvSpPr>
+          <p:cNvPr id="2" name="Slide Image Placeholder 1"/>
+          <p:cNvSpPr>
+            <a:spLocks noGrp="1" noRot="1" noChangeAspect="1"/>
+          </p:cNvSpPr>
+          <p:nvPr>
+            <p:ph type="sldImg"/>
+          </p:nvPr>
+        </p:nvSpPr>
+        <p:spPr/>
+      </p:sp>
+      <p:sp>
+        <p:nvSpPr>
+          <p:cNvPr id="3" name="Notes Placeholder 2"/>
+          <p:cNvSpPr>
+            <a:spLocks noGrp="1"/>
+          </p:cNvSpPr>
+          <p:nvPr>
+            <p:ph type="body" idx="1"/>
+          </p:nvPr>
+        </p:nvSpPr>
+        <p:spPr/>
+        <p:txBody>
+          <a:bodyPr/>
+          <a:lstStyle/>
+          <a:p>
+            <a:r>
+              <a:rPr lang="en-US" dirty="0"/>
+              <a:t/>
+            </a:r>
+            <a:endParaRPr lang="en-US" dirty="0"/>
+          </a:p>
+        </p:txBody>
+      </p:sp>
+      <p:sp>
+        <p:nvSpPr>
+          <p:cNvPr id="4" name="Slide Number Placeholder 3"/>
+          <p:cNvSpPr>
+            <a:spLocks noGrp="1"/>
+          </p:cNvSpPr>
+          <p:nvPr>
+            <p:ph type="sldNum" sz="quarter" idx="10"/>
+          </p:nvPr>
+        </p:nvSpPr>
+        <p:spPr/>
+        <p:txBody>
+          <a:bodyPr/>
+          <a:lstStyle/>
+          <a:p>
+            <a:fld id="{F7021451-1387-4CA6-816F-3879F97B5CBC}" type="slidenum">
+              <a:rPr lang="en-US"/>
+              <a:t>20</a:t>
             </a:fld>
             <a:endParaRPr lang="en-US"/>
           </a:p>
@@ -10455,14 +10907,39 @@
       </p:sp>
       <p:sp>
         <p:nvSpPr>
-          <p:cNvPr id="11" name="Text 8"/>
+          <p:cNvPr id="11" name="Shape 8"/>
           <p:cNvSpPr/>
           <p:nvPr/>
         </p:nvSpPr>
         <p:spPr>
           <a:xfrm>
-            <a:off x="548640" y="3017520"/>
-            <a:ext cx="8046720" cy="237744"/>
+            <a:off x="548640" y="3035808"/>
+            <a:ext cx="8046720" cy="1078992"/>
+          </a:xfrm>
+          <a:prstGeom prst="rect">
+            <a:avLst/>
+          </a:prstGeom>
+          <a:solidFill>
+            <a:srgbClr val="FAFAFA"/>
+          </a:solidFill>
+          <a:ln w="9525">
+            <a:solidFill>
+              <a:srgbClr val="BFBFBF"/>
+            </a:solidFill>
+            <a:prstDash val="dash"/>
+          </a:ln>
+        </p:spPr>
+      </p:sp>
+      <p:sp>
+        <p:nvSpPr>
+          <p:cNvPr id="12" name="Text 9"/>
+          <p:cNvSpPr/>
+          <p:nvPr/>
+        </p:nvSpPr>
+        <p:spPr>
+          <a:xfrm>
+            <a:off x="621792" y="3035808"/>
+            <a:ext cx="7900416" cy="1078992"/>
           </a:xfrm>
           <a:prstGeom prst="rect">
             <a:avLst/>
@@ -10474,905 +10951,27 @@
           <a:bodyPr wrap="square" lIns="0" tIns="0" rIns="0" bIns="0" rtlCol="0" anchor="ctr"/>
           <a:lstStyle/>
           <a:p>
-            <a:pPr indent="0" marL="0">
-              <a:buNone/>
-            </a:pPr>
-            <a:r>
-              <a:rPr lang="en-US" sz="1200" b="1" dirty="0">
-                <a:solidFill>
-                  <a:srgbClr val="1F4E79"/>
-                </a:solidFill>
-                <a:latin typeface="Calibri" pitchFamily="34" charset="0"/>
-                <a:ea typeface="Calibri" pitchFamily="34" charset="-122"/>
-                <a:cs typeface="Calibri" pitchFamily="34" charset="-120"/>
-              </a:rPr>
-              <a:t>(b)  ★ The SE response curve does not transfer between electrodes  (new, Aug 2026)</a:t>
-            </a:r>
-            <a:endParaRPr lang="en-US" sz="1200" dirty="0"/>
-          </a:p>
-        </p:txBody>
-      </p:sp>
-      <p:graphicFrame>
-        <p:nvGraphicFramePr>
-          <p:cNvPr id="29" name="Table 1"/>
-          <p:cNvGraphicFramePr>
-            <a:graphicFrameLocks noGrp="1"/>
-          </p:cNvGraphicFramePr>
-          <p:nvPr>
-            <p:extLst>
-              <p:ext uri="{D42A27DB-BD31-4B8C-83A1-F6EECF244321}">
-                <p14:modId xmlns:p14="http://schemas.microsoft.com/office/powerpoint/2010/main" val="1579011935"/>
-              </p:ext>
-            </p:extLst>
-          </p:nvPr>
-        </p:nvGraphicFramePr>
-        <p:xfrm>
-          <a:off x="548640" y="3310128"/>
-          <a:ext cx="4206240" cy="914400"/>
-        </p:xfrm>
-        <a:graphic>
-          <a:graphicData uri="http://schemas.openxmlformats.org/drawingml/2006/table">
-            <a:tbl>
-              <a:tblPr/>
-              <a:tblGrid>
-                <a:gridCol w="2011680"/>
-                <a:gridCol w="548640"/>
-                <a:gridCol w="548640"/>
-                <a:gridCol w="548640"/>
-                <a:gridCol w="548640"/>
-              </a:tblGrid>
-              <a:tr h="237744">
-                <a:tc>
-                  <a:txBody>
-                    <a:bodyPr/>
-                    <a:lstStyle/>
-                    <a:p>
-                      <a:pPr algn="ctr" indent="0" marL="0">
-                        <a:buNone/>
-                      </a:pPr>
-                      <a:r>
-                        <a:rPr lang="en-US" sz="1000" b="1" dirty="0">
-                          <a:solidFill>
-                            <a:srgbClr val="1F4E79"/>
-                          </a:solidFill>
-                          <a:latin typeface="Calibri" pitchFamily="34" charset="0"/>
-                          <a:ea typeface="Calibri" pitchFamily="34" charset="-122"/>
-                          <a:cs typeface="Calibri" pitchFamily="34" charset="-120"/>
-                        </a:rPr>
-                        <a:t>SE packing fraction φ</a:t>
-                      </a:r>
-                      <a:endParaRPr lang="en-US" sz="1000" dirty="0">
-                        <a:latin typeface="Calibri" charset="0"/>
-                        <a:ea typeface="Calibri" charset="0"/>
-                        <a:cs typeface="Calibri" charset="0"/>
-                      </a:endParaRPr>
-                    </a:p>
-                  </a:txBody>
-                  <a:tcPr marL="38100" marR="38100" marT="38100" marB="38100" anchor="ctr">
-                    <a:lnL w="6350" cap="flat" cmpd="sng" algn="ctr">
-                      <a:solidFill>
-                        <a:srgbClr val="BFBFBF"/>
-                      </a:solidFill>
-                      <a:prstDash val="solid"/>
-                      <a:round/>
-                      <a:headEnd type="none" w="med" len="med"/>
-                      <a:tailEnd type="none" w="med" len="med"/>
-                    </a:lnL>
-                    <a:lnR w="6350" cap="flat" cmpd="sng" algn="ctr">
-                      <a:solidFill>
-                        <a:srgbClr val="BFBFBF"/>
-                      </a:solidFill>
-                      <a:prstDash val="solid"/>
-                      <a:round/>
-                      <a:headEnd type="none" w="med" len="med"/>
-                      <a:tailEnd type="none" w="med" len="med"/>
-                    </a:lnR>
-                    <a:lnT w="6350" cap="flat" cmpd="sng" algn="ctr">
-                      <a:solidFill>
-                        <a:srgbClr val="BFBFBF"/>
-                      </a:solidFill>
-                      <a:prstDash val="solid"/>
-                      <a:round/>
-                      <a:headEnd type="none" w="med" len="med"/>
-                      <a:tailEnd type="none" w="med" len="med"/>
-                    </a:lnT>
-                    <a:lnB w="6350" cap="flat" cmpd="sng" algn="ctr">
-                      <a:solidFill>
-                        <a:srgbClr val="BFBFBF"/>
-                      </a:solidFill>
-                      <a:prstDash val="solid"/>
-                      <a:round/>
-                      <a:headEnd type="none" w="med" len="med"/>
-                      <a:tailEnd type="none" w="med" len="med"/>
-                    </a:lnB>
-                    <a:solidFill>
-                      <a:srgbClr val="DCE6F1"/>
-                    </a:solidFill>
-                  </a:tcPr>
-                </a:tc>
-                <a:tc>
-                  <a:txBody>
-                    <a:bodyPr/>
-                    <a:lstStyle/>
-                    <a:p>
-                      <a:pPr algn="ctr" indent="0" marL="0">
-                        <a:buNone/>
-                      </a:pPr>
-                      <a:r>
-                        <a:rPr lang="en-US" sz="1000" b="1" dirty="0">
-                          <a:solidFill>
-                            <a:srgbClr val="1F4E79"/>
-                          </a:solidFill>
-                          <a:latin typeface="Calibri" pitchFamily="34" charset="0"/>
-                          <a:ea typeface="Calibri" pitchFamily="34" charset="-122"/>
-                          <a:cs typeface="Calibri" pitchFamily="34" charset="-120"/>
-                        </a:rPr>
-                        <a:t>0.700</a:t>
-                      </a:r>
-                      <a:endParaRPr lang="en-US" sz="1000" dirty="0">
-                        <a:latin typeface="Calibri" charset="0"/>
-                        <a:ea typeface="Calibri" charset="0"/>
-                        <a:cs typeface="Calibri" charset="0"/>
-                      </a:endParaRPr>
-                    </a:p>
-                  </a:txBody>
-                  <a:tcPr marL="38100" marR="38100" marT="38100" marB="38100" anchor="ctr">
-                    <a:lnL w="6350" cap="flat" cmpd="sng" algn="ctr">
-                      <a:solidFill>
-                        <a:srgbClr val="BFBFBF"/>
-                      </a:solidFill>
-                      <a:prstDash val="solid"/>
-                      <a:round/>
-                      <a:headEnd type="none" w="med" len="med"/>
-                      <a:tailEnd type="none" w="med" len="med"/>
-                    </a:lnL>
-                    <a:lnR w="6350" cap="flat" cmpd="sng" algn="ctr">
-                      <a:solidFill>
-                        <a:srgbClr val="BFBFBF"/>
-                      </a:solidFill>
-                      <a:prstDash val="solid"/>
-                      <a:round/>
-                      <a:headEnd type="none" w="med" len="med"/>
-                      <a:tailEnd type="none" w="med" len="med"/>
-                    </a:lnR>
-                    <a:lnT w="6350" cap="flat" cmpd="sng" algn="ctr">
-                      <a:solidFill>
-                        <a:srgbClr val="BFBFBF"/>
-                      </a:solidFill>
-                      <a:prstDash val="solid"/>
-                      <a:round/>
-                      <a:headEnd type="none" w="med" len="med"/>
-                      <a:tailEnd type="none" w="med" len="med"/>
-                    </a:lnT>
-                    <a:lnB w="6350" cap="flat" cmpd="sng" algn="ctr">
-                      <a:solidFill>
-                        <a:srgbClr val="BFBFBF"/>
-                      </a:solidFill>
-                      <a:prstDash val="solid"/>
-                      <a:round/>
-                      <a:headEnd type="none" w="med" len="med"/>
-                      <a:tailEnd type="none" w="med" len="med"/>
-                    </a:lnB>
-                    <a:solidFill>
-                      <a:srgbClr val="DCE6F1"/>
-                    </a:solidFill>
-                  </a:tcPr>
-                </a:tc>
-                <a:tc>
-                  <a:txBody>
-                    <a:bodyPr/>
-                    <a:lstStyle/>
-                    <a:p>
-                      <a:pPr algn="ctr" indent="0" marL="0">
-                        <a:buNone/>
-                      </a:pPr>
-                      <a:r>
-                        <a:rPr lang="en-US" sz="1000" b="1" dirty="0">
-                          <a:solidFill>
-                            <a:srgbClr val="1F4E79"/>
-                          </a:solidFill>
-                          <a:latin typeface="Calibri" pitchFamily="34" charset="0"/>
-                          <a:ea typeface="Calibri" pitchFamily="34" charset="-122"/>
-                          <a:cs typeface="Calibri" pitchFamily="34" charset="-120"/>
-                        </a:rPr>
-                        <a:t>0.754</a:t>
-                      </a:r>
-                      <a:endParaRPr lang="en-US" sz="1000" dirty="0">
-                        <a:latin typeface="Calibri" charset="0"/>
-                        <a:ea typeface="Calibri" charset="0"/>
-                        <a:cs typeface="Calibri" charset="0"/>
-                      </a:endParaRPr>
-                    </a:p>
-                  </a:txBody>
-                  <a:tcPr marL="38100" marR="38100" marT="38100" marB="38100" anchor="ctr">
-                    <a:lnL w="6350" cap="flat" cmpd="sng" algn="ctr">
-                      <a:solidFill>
-                        <a:srgbClr val="BFBFBF"/>
-                      </a:solidFill>
-                      <a:prstDash val="solid"/>
-                      <a:round/>
-                      <a:headEnd type="none" w="med" len="med"/>
-                      <a:tailEnd type="none" w="med" len="med"/>
-                    </a:lnL>
-                    <a:lnR w="6350" cap="flat" cmpd="sng" algn="ctr">
-                      <a:solidFill>
-                        <a:srgbClr val="BFBFBF"/>
-                      </a:solidFill>
-                      <a:prstDash val="solid"/>
-                      <a:round/>
-                      <a:headEnd type="none" w="med" len="med"/>
-                      <a:tailEnd type="none" w="med" len="med"/>
-                    </a:lnR>
-                    <a:lnT w="6350" cap="flat" cmpd="sng" algn="ctr">
-                      <a:solidFill>
-                        <a:srgbClr val="BFBFBF"/>
-                      </a:solidFill>
-                      <a:prstDash val="solid"/>
-                      <a:round/>
-                      <a:headEnd type="none" w="med" len="med"/>
-                      <a:tailEnd type="none" w="med" len="med"/>
-                    </a:lnT>
-                    <a:lnB w="6350" cap="flat" cmpd="sng" algn="ctr">
-                      <a:solidFill>
-                        <a:srgbClr val="BFBFBF"/>
-                      </a:solidFill>
-                      <a:prstDash val="solid"/>
-                      <a:round/>
-                      <a:headEnd type="none" w="med" len="med"/>
-                      <a:tailEnd type="none" w="med" len="med"/>
-                    </a:lnB>
-                    <a:solidFill>
-                      <a:srgbClr val="DCE6F1"/>
-                    </a:solidFill>
-                  </a:tcPr>
-                </a:tc>
-                <a:tc>
-                  <a:txBody>
-                    <a:bodyPr/>
-                    <a:lstStyle/>
-                    <a:p>
-                      <a:pPr algn="ctr" indent="0" marL="0">
-                        <a:buNone/>
-                      </a:pPr>
-                      <a:r>
-                        <a:rPr lang="en-US" sz="1000" b="1" dirty="0">
-                          <a:solidFill>
-                            <a:srgbClr val="1F4E79"/>
-                          </a:solidFill>
-                          <a:latin typeface="Calibri" pitchFamily="34" charset="0"/>
-                          <a:ea typeface="Calibri" pitchFamily="34" charset="-122"/>
-                          <a:cs typeface="Calibri" pitchFamily="34" charset="-120"/>
-                        </a:rPr>
-                        <a:t>0.851</a:t>
-                      </a:r>
-                      <a:endParaRPr lang="en-US" sz="1000" dirty="0">
-                        <a:latin typeface="Calibri" charset="0"/>
-                        <a:ea typeface="Calibri" charset="0"/>
-                        <a:cs typeface="Calibri" charset="0"/>
-                      </a:endParaRPr>
-                    </a:p>
-                  </a:txBody>
-                  <a:tcPr marL="38100" marR="38100" marT="38100" marB="38100" anchor="ctr">
-                    <a:lnL w="6350" cap="flat" cmpd="sng" algn="ctr">
-                      <a:solidFill>
-                        <a:srgbClr val="BFBFBF"/>
-                      </a:solidFill>
-                      <a:prstDash val="solid"/>
-                      <a:round/>
-                      <a:headEnd type="none" w="med" len="med"/>
-                      <a:tailEnd type="none" w="med" len="med"/>
-                    </a:lnL>
-                    <a:lnR w="6350" cap="flat" cmpd="sng" algn="ctr">
-                      <a:solidFill>
-                        <a:srgbClr val="BFBFBF"/>
-                      </a:solidFill>
-                      <a:prstDash val="solid"/>
-                      <a:round/>
-                      <a:headEnd type="none" w="med" len="med"/>
-                      <a:tailEnd type="none" w="med" len="med"/>
-                    </a:lnR>
-                    <a:lnT w="6350" cap="flat" cmpd="sng" algn="ctr">
-                      <a:solidFill>
-                        <a:srgbClr val="BFBFBF"/>
-                      </a:solidFill>
-                      <a:prstDash val="solid"/>
-                      <a:round/>
-                      <a:headEnd type="none" w="med" len="med"/>
-                      <a:tailEnd type="none" w="med" len="med"/>
-                    </a:lnT>
-                    <a:lnB w="6350" cap="flat" cmpd="sng" algn="ctr">
-                      <a:solidFill>
-                        <a:srgbClr val="BFBFBF"/>
-                      </a:solidFill>
-                      <a:prstDash val="solid"/>
-                      <a:round/>
-                      <a:headEnd type="none" w="med" len="med"/>
-                      <a:tailEnd type="none" w="med" len="med"/>
-                    </a:lnB>
-                    <a:solidFill>
-                      <a:srgbClr val="DCE6F1"/>
-                    </a:solidFill>
-                  </a:tcPr>
-                </a:tc>
-                <a:tc>
-                  <a:txBody>
-                    <a:bodyPr/>
-                    <a:lstStyle/>
-                    <a:p>
-                      <a:pPr algn="ctr" indent="0" marL="0">
-                        <a:buNone/>
-                      </a:pPr>
-                      <a:r>
-                        <a:rPr lang="en-US" sz="1000" b="1" dirty="0">
-                          <a:solidFill>
-                            <a:srgbClr val="1F4E79"/>
-                          </a:solidFill>
-                          <a:latin typeface="Calibri" pitchFamily="34" charset="0"/>
-                          <a:ea typeface="Calibri" pitchFamily="34" charset="-122"/>
-                          <a:cs typeface="Calibri" pitchFamily="34" charset="-120"/>
-                        </a:rPr>
-                        <a:t>0.905</a:t>
-                      </a:r>
-                      <a:endParaRPr lang="en-US" sz="1000" dirty="0">
-                        <a:latin typeface="Calibri" charset="0"/>
-                        <a:ea typeface="Calibri" charset="0"/>
-                        <a:cs typeface="Calibri" charset="0"/>
-                      </a:endParaRPr>
-                    </a:p>
-                  </a:txBody>
-                  <a:tcPr marL="38100" marR="38100" marT="38100" marB="38100" anchor="ctr">
-                    <a:lnL w="6350" cap="flat" cmpd="sng" algn="ctr">
-                      <a:solidFill>
-                        <a:srgbClr val="BFBFBF"/>
-                      </a:solidFill>
-                      <a:prstDash val="solid"/>
-                      <a:round/>
-                      <a:headEnd type="none" w="med" len="med"/>
-                      <a:tailEnd type="none" w="med" len="med"/>
-                    </a:lnL>
-                    <a:lnR w="6350" cap="flat" cmpd="sng" algn="ctr">
-                      <a:solidFill>
-                        <a:srgbClr val="BFBFBF"/>
-                      </a:solidFill>
-                      <a:prstDash val="solid"/>
-                      <a:round/>
-                      <a:headEnd type="none" w="med" len="med"/>
-                      <a:tailEnd type="none" w="med" len="med"/>
-                    </a:lnR>
-                    <a:lnT w="6350" cap="flat" cmpd="sng" algn="ctr">
-                      <a:solidFill>
-                        <a:srgbClr val="BFBFBF"/>
-                      </a:solidFill>
-                      <a:prstDash val="solid"/>
-                      <a:round/>
-                      <a:headEnd type="none" w="med" len="med"/>
-                      <a:tailEnd type="none" w="med" len="med"/>
-                    </a:lnT>
-                    <a:lnB w="6350" cap="flat" cmpd="sng" algn="ctr">
-                      <a:solidFill>
-                        <a:srgbClr val="BFBFBF"/>
-                      </a:solidFill>
-                      <a:prstDash val="solid"/>
-                      <a:round/>
-                      <a:headEnd type="none" w="med" len="med"/>
-                      <a:tailEnd type="none" w="med" len="med"/>
-                    </a:lnB>
-                    <a:solidFill>
-                      <a:srgbClr val="DCE6F1"/>
-                    </a:solidFill>
-                  </a:tcPr>
-                </a:tc>
-              </a:tr>
-              <a:tr h="237744">
-                <a:tc>
-                  <a:txBody>
-                    <a:bodyPr/>
-                    <a:lstStyle/>
-                    <a:p>
-                      <a:pPr algn="l" indent="0" marL="0">
-                        <a:buNone/>
-                      </a:pPr>
-                      <a:r>
-                        <a:rPr lang="en-US" sz="1000" dirty="0">
-                          <a:solidFill>
-                            <a:srgbClr val="262626"/>
-                          </a:solidFill>
-                          <a:latin typeface="Calibri" pitchFamily="34" charset="0"/>
-                          <a:ea typeface="Calibri" pitchFamily="34" charset="-122"/>
-                          <a:cs typeface="Calibri" pitchFamily="34" charset="-120"/>
-                        </a:rPr>
-                        <a:t>σ(other bed) / σ(reference)</a:t>
-                      </a:r>
-                      <a:endParaRPr lang="en-US" sz="1000" dirty="0">
-                        <a:latin typeface="Calibri" charset="0"/>
-                        <a:ea typeface="Calibri" charset="0"/>
-                        <a:cs typeface="Calibri" charset="0"/>
-                      </a:endParaRPr>
-                    </a:p>
-                  </a:txBody>
-                  <a:tcPr marL="38100" marR="38100" marT="38100" marB="38100" anchor="ctr">
-                    <a:lnL w="6350" cap="flat" cmpd="sng" algn="ctr">
-                      <a:solidFill>
-                        <a:srgbClr val="BFBFBF"/>
-                      </a:solidFill>
-                      <a:prstDash val="solid"/>
-                      <a:round/>
-                      <a:headEnd type="none" w="med" len="med"/>
-                      <a:tailEnd type="none" w="med" len="med"/>
-                    </a:lnL>
-                    <a:lnR w="6350" cap="flat" cmpd="sng" algn="ctr">
-                      <a:solidFill>
-                        <a:srgbClr val="BFBFBF"/>
-                      </a:solidFill>
-                      <a:prstDash val="solid"/>
-                      <a:round/>
-                      <a:headEnd type="none" w="med" len="med"/>
-                      <a:tailEnd type="none" w="med" len="med"/>
-                    </a:lnR>
-                    <a:lnT w="6350" cap="flat" cmpd="sng" algn="ctr">
-                      <a:solidFill>
-                        <a:srgbClr val="BFBFBF"/>
-                      </a:solidFill>
-                      <a:prstDash val="solid"/>
-                      <a:round/>
-                      <a:headEnd type="none" w="med" len="med"/>
-                      <a:tailEnd type="none" w="med" len="med"/>
-                    </a:lnT>
-                    <a:lnB w="6350" cap="flat" cmpd="sng" algn="ctr">
-                      <a:solidFill>
-                        <a:srgbClr val="BFBFBF"/>
-                      </a:solidFill>
-                      <a:prstDash val="solid"/>
-                      <a:round/>
-                      <a:headEnd type="none" w="med" len="med"/>
-                      <a:tailEnd type="none" w="med" len="med"/>
-                    </a:lnB>
-                    <a:solidFill>
-                      <a:srgbClr val="FFFFFF"/>
-                    </a:solidFill>
-                  </a:tcPr>
-                </a:tc>
-                <a:tc>
-                  <a:txBody>
-                    <a:bodyPr/>
-                    <a:lstStyle/>
-                    <a:p>
-                      <a:pPr algn="l" indent="0" marL="0">
-                        <a:buNone/>
-                      </a:pPr>
-                      <a:r>
-                        <a:rPr lang="en-US" sz="1000" dirty="0">
-                          <a:solidFill>
-                            <a:srgbClr val="262626"/>
-                          </a:solidFill>
-                          <a:latin typeface="Calibri" pitchFamily="34" charset="0"/>
-                          <a:ea typeface="Calibri" pitchFamily="34" charset="-122"/>
-                          <a:cs typeface="Calibri" pitchFamily="34" charset="-120"/>
-                        </a:rPr>
-                        <a:t>2.96×</a:t>
-                      </a:r>
-                      <a:endParaRPr lang="en-US" sz="1000" dirty="0">
-                        <a:latin typeface="Calibri" charset="0"/>
-                        <a:ea typeface="Calibri" charset="0"/>
-                        <a:cs typeface="Calibri" charset="0"/>
-                      </a:endParaRPr>
-                    </a:p>
-                  </a:txBody>
-                  <a:tcPr marL="38100" marR="38100" marT="38100" marB="38100" anchor="ctr">
-                    <a:lnL w="6350" cap="flat" cmpd="sng" algn="ctr">
-                      <a:solidFill>
-                        <a:srgbClr val="BFBFBF"/>
-                      </a:solidFill>
-                      <a:prstDash val="solid"/>
-                      <a:round/>
-                      <a:headEnd type="none" w="med" len="med"/>
-                      <a:tailEnd type="none" w="med" len="med"/>
-                    </a:lnL>
-                    <a:lnR w="6350" cap="flat" cmpd="sng" algn="ctr">
-                      <a:solidFill>
-                        <a:srgbClr val="BFBFBF"/>
-                      </a:solidFill>
-                      <a:prstDash val="solid"/>
-                      <a:round/>
-                      <a:headEnd type="none" w="med" len="med"/>
-                      <a:tailEnd type="none" w="med" len="med"/>
-                    </a:lnR>
-                    <a:lnT w="6350" cap="flat" cmpd="sng" algn="ctr">
-                      <a:solidFill>
-                        <a:srgbClr val="BFBFBF"/>
-                      </a:solidFill>
-                      <a:prstDash val="solid"/>
-                      <a:round/>
-                      <a:headEnd type="none" w="med" len="med"/>
-                      <a:tailEnd type="none" w="med" len="med"/>
-                    </a:lnT>
-                    <a:lnB w="6350" cap="flat" cmpd="sng" algn="ctr">
-                      <a:solidFill>
-                        <a:srgbClr val="BFBFBF"/>
-                      </a:solidFill>
-                      <a:prstDash val="solid"/>
-                      <a:round/>
-                      <a:headEnd type="none" w="med" len="med"/>
-                      <a:tailEnd type="none" w="med" len="med"/>
-                    </a:lnB>
-                    <a:solidFill>
-                      <a:srgbClr val="FFFFFF"/>
-                    </a:solidFill>
-                  </a:tcPr>
-                </a:tc>
-                <a:tc>
-                  <a:txBody>
-                    <a:bodyPr/>
-                    <a:lstStyle/>
-                    <a:p>
-                      <a:pPr algn="l" indent="0" marL="0">
-                        <a:buNone/>
-                      </a:pPr>
-                      <a:r>
-                        <a:rPr lang="en-US" sz="1000" dirty="0">
-                          <a:solidFill>
-                            <a:srgbClr val="262626"/>
-                          </a:solidFill>
-                          <a:latin typeface="Calibri" pitchFamily="34" charset="0"/>
-                          <a:ea typeface="Calibri" pitchFamily="34" charset="-122"/>
-                          <a:cs typeface="Calibri" pitchFamily="34" charset="-120"/>
-                        </a:rPr>
-                        <a:t>2.83×</a:t>
-                      </a:r>
-                      <a:endParaRPr lang="en-US" sz="1000" dirty="0">
-                        <a:latin typeface="Calibri" charset="0"/>
-                        <a:ea typeface="Calibri" charset="0"/>
-                        <a:cs typeface="Calibri" charset="0"/>
-                      </a:endParaRPr>
-                    </a:p>
-                  </a:txBody>
-                  <a:tcPr marL="38100" marR="38100" marT="38100" marB="38100" anchor="ctr">
-                    <a:lnL w="6350" cap="flat" cmpd="sng" algn="ctr">
-                      <a:solidFill>
-                        <a:srgbClr val="BFBFBF"/>
-                      </a:solidFill>
-                      <a:prstDash val="solid"/>
-                      <a:round/>
-                      <a:headEnd type="none" w="med" len="med"/>
-                      <a:tailEnd type="none" w="med" len="med"/>
-                    </a:lnL>
-                    <a:lnR w="6350" cap="flat" cmpd="sng" algn="ctr">
-                      <a:solidFill>
-                        <a:srgbClr val="BFBFBF"/>
-                      </a:solidFill>
-                      <a:prstDash val="solid"/>
-                      <a:round/>
-                      <a:headEnd type="none" w="med" len="med"/>
-                      <a:tailEnd type="none" w="med" len="med"/>
-                    </a:lnR>
-                    <a:lnT w="6350" cap="flat" cmpd="sng" algn="ctr">
-                      <a:solidFill>
-                        <a:srgbClr val="BFBFBF"/>
-                      </a:solidFill>
-                      <a:prstDash val="solid"/>
-                      <a:round/>
-                      <a:headEnd type="none" w="med" len="med"/>
-                      <a:tailEnd type="none" w="med" len="med"/>
-                    </a:lnT>
-                    <a:lnB w="6350" cap="flat" cmpd="sng" algn="ctr">
-                      <a:solidFill>
-                        <a:srgbClr val="BFBFBF"/>
-                      </a:solidFill>
-                      <a:prstDash val="solid"/>
-                      <a:round/>
-                      <a:headEnd type="none" w="med" len="med"/>
-                      <a:tailEnd type="none" w="med" len="med"/>
-                    </a:lnB>
-                    <a:solidFill>
-                      <a:srgbClr val="FFFFFF"/>
-                    </a:solidFill>
-                  </a:tcPr>
-                </a:tc>
-                <a:tc>
-                  <a:txBody>
-                    <a:bodyPr/>
-                    <a:lstStyle/>
-                    <a:p>
-                      <a:pPr algn="l" indent="0" marL="0">
-                        <a:buNone/>
-                      </a:pPr>
-                      <a:r>
-                        <a:rPr lang="en-US" sz="1000" dirty="0">
-                          <a:solidFill>
-                            <a:srgbClr val="262626"/>
-                          </a:solidFill>
-                          <a:latin typeface="Calibri" pitchFamily="34" charset="0"/>
-                          <a:ea typeface="Calibri" pitchFamily="34" charset="-122"/>
-                          <a:cs typeface="Calibri" pitchFamily="34" charset="-120"/>
-                        </a:rPr>
-                        <a:t>3.65×</a:t>
-                      </a:r>
-                      <a:endParaRPr lang="en-US" sz="1000" dirty="0">
-                        <a:latin typeface="Calibri" charset="0"/>
-                        <a:ea typeface="Calibri" charset="0"/>
-                        <a:cs typeface="Calibri" charset="0"/>
-                      </a:endParaRPr>
-                    </a:p>
-                  </a:txBody>
-                  <a:tcPr marL="38100" marR="38100" marT="38100" marB="38100" anchor="ctr">
-                    <a:lnL w="6350" cap="flat" cmpd="sng" algn="ctr">
-                      <a:solidFill>
-                        <a:srgbClr val="BFBFBF"/>
-                      </a:solidFill>
-                      <a:prstDash val="solid"/>
-                      <a:round/>
-                      <a:headEnd type="none" w="med" len="med"/>
-                      <a:tailEnd type="none" w="med" len="med"/>
-                    </a:lnL>
-                    <a:lnR w="6350" cap="flat" cmpd="sng" algn="ctr">
-                      <a:solidFill>
-                        <a:srgbClr val="BFBFBF"/>
-                      </a:solidFill>
-                      <a:prstDash val="solid"/>
-                      <a:round/>
-                      <a:headEnd type="none" w="med" len="med"/>
-                      <a:tailEnd type="none" w="med" len="med"/>
-                    </a:lnR>
-                    <a:lnT w="6350" cap="flat" cmpd="sng" algn="ctr">
-                      <a:solidFill>
-                        <a:srgbClr val="BFBFBF"/>
-                      </a:solidFill>
-                      <a:prstDash val="solid"/>
-                      <a:round/>
-                      <a:headEnd type="none" w="med" len="med"/>
-                      <a:tailEnd type="none" w="med" len="med"/>
-                    </a:lnT>
-                    <a:lnB w="6350" cap="flat" cmpd="sng" algn="ctr">
-                      <a:solidFill>
-                        <a:srgbClr val="BFBFBF"/>
-                      </a:solidFill>
-                      <a:prstDash val="solid"/>
-                      <a:round/>
-                      <a:headEnd type="none" w="med" len="med"/>
-                      <a:tailEnd type="none" w="med" len="med"/>
-                    </a:lnB>
-                    <a:solidFill>
-                      <a:srgbClr val="FFFFFF"/>
-                    </a:solidFill>
-                  </a:tcPr>
-                </a:tc>
-                <a:tc>
-                  <a:txBody>
-                    <a:bodyPr/>
-                    <a:lstStyle/>
-                    <a:p>
-                      <a:pPr algn="l" indent="0" marL="0">
-                        <a:buNone/>
-                      </a:pPr>
-                      <a:r>
-                        <a:rPr lang="en-US" sz="1000" dirty="0">
-                          <a:solidFill>
-                            <a:srgbClr val="262626"/>
-                          </a:solidFill>
-                          <a:latin typeface="Calibri" pitchFamily="34" charset="0"/>
-                          <a:ea typeface="Calibri" pitchFamily="34" charset="-122"/>
-                          <a:cs typeface="Calibri" pitchFamily="34" charset="-120"/>
-                        </a:rPr>
-                        <a:t>3.83×</a:t>
-                      </a:r>
-                      <a:endParaRPr lang="en-US" sz="1000" dirty="0">
-                        <a:latin typeface="Calibri" charset="0"/>
-                        <a:ea typeface="Calibri" charset="0"/>
-                        <a:cs typeface="Calibri" charset="0"/>
-                      </a:endParaRPr>
-                    </a:p>
-                  </a:txBody>
-                  <a:tcPr marL="38100" marR="38100" marT="38100" marB="38100" anchor="ctr">
-                    <a:lnL w="6350" cap="flat" cmpd="sng" algn="ctr">
-                      <a:solidFill>
-                        <a:srgbClr val="BFBFBF"/>
-                      </a:solidFill>
-                      <a:prstDash val="solid"/>
-                      <a:round/>
-                      <a:headEnd type="none" w="med" len="med"/>
-                      <a:tailEnd type="none" w="med" len="med"/>
-                    </a:lnL>
-                    <a:lnR w="6350" cap="flat" cmpd="sng" algn="ctr">
-                      <a:solidFill>
-                        <a:srgbClr val="BFBFBF"/>
-                      </a:solidFill>
-                      <a:prstDash val="solid"/>
-                      <a:round/>
-                      <a:headEnd type="none" w="med" len="med"/>
-                      <a:tailEnd type="none" w="med" len="med"/>
-                    </a:lnR>
-                    <a:lnT w="6350" cap="flat" cmpd="sng" algn="ctr">
-                      <a:solidFill>
-                        <a:srgbClr val="BFBFBF"/>
-                      </a:solidFill>
-                      <a:prstDash val="solid"/>
-                      <a:round/>
-                      <a:headEnd type="none" w="med" len="med"/>
-                      <a:tailEnd type="none" w="med" len="med"/>
-                    </a:lnT>
-                    <a:lnB w="6350" cap="flat" cmpd="sng" algn="ctr">
-                      <a:solidFill>
-                        <a:srgbClr val="BFBFBF"/>
-                      </a:solidFill>
-                      <a:prstDash val="solid"/>
-                      <a:round/>
-                      <a:headEnd type="none" w="med" len="med"/>
-                      <a:tailEnd type="none" w="med" len="med"/>
-                    </a:lnB>
-                    <a:solidFill>
-                      <a:srgbClr val="FFFFFF"/>
-                    </a:solidFill>
-                  </a:tcPr>
-                </a:tc>
-              </a:tr>
-            </a:tbl>
-          </a:graphicData>
-        </a:graphic>
-      </p:graphicFrame>
-      <p:sp>
-        <p:nvSpPr>
-          <p:cNvPr id="13" name="Text 9"/>
-          <p:cNvSpPr/>
-          <p:nvPr/>
-        </p:nvSpPr>
-        <p:spPr>
-          <a:xfrm>
-            <a:off x="4892040" y="3273552"/>
-            <a:ext cx="3794760" cy="868680"/>
-          </a:xfrm>
-          <a:prstGeom prst="rect">
-            <a:avLst/>
-          </a:prstGeom>
-          <a:noFill/>
-          <a:ln/>
-        </p:spPr>
-        <p:txBody>
-          <a:bodyPr wrap="square" lIns="0" tIns="0" rIns="0" bIns="0" rtlCol="0" anchor="t"/>
-          <a:lstStyle/>
-          <a:p>
-            <a:pPr indent="0" marL="0">
-              <a:lnSpc>
-                <a:spcPts val="1300"/>
-              </a:lnSpc>
-              <a:buNone/>
-            </a:pPr>
-            <a:r>
-              <a:rPr lang="en-US" sz="1050" b="1" dirty="0">
-                <a:solidFill>
-                  <a:srgbClr val="1F4E79"/>
-                </a:solidFill>
-                <a:latin typeface="Calibri" pitchFamily="34" charset="0"/>
-                <a:ea typeface="Calibri" pitchFamily="34" charset="-122"/>
-                <a:cs typeface="Calibri" pitchFamily="34" charset="-120"/>
-              </a:rPr>
-              <a:t>Mechanism:  </a:t>
-            </a:r>
-            <a:pPr indent="0" marL="0">
-              <a:lnSpc>
-                <a:spcPts val="1300"/>
-              </a:lnSpc>
-              <a:buNone/>
-            </a:pPr>
-            <a:r>
-              <a:rPr lang="en-US" sz="1050" dirty="0">
-                <a:solidFill>
-                  <a:srgbClr val="262626"/>
-                </a:solidFill>
-                <a:latin typeface="Calibri" pitchFamily="34" charset="0"/>
-                <a:ea typeface="Calibri" pitchFamily="34" charset="-122"/>
-                <a:cs typeface="Calibri" pitchFamily="34" charset="-120"/>
-              </a:rPr>
-              <a:t>von Mises caps only the shape-changing stress — </a:t>
-            </a:r>
-            <a:pPr indent="0" marL="0">
-              <a:lnSpc>
-                <a:spcPts val="1300"/>
-              </a:lnSpc>
-              <a:buNone/>
-            </a:pPr>
-            <a:r>
-              <a:rPr lang="en-US" sz="1050" b="1" dirty="0">
-                <a:solidFill>
-                  <a:srgbClr val="C00000"/>
-                </a:solidFill>
-                <a:latin typeface="Calibri" pitchFamily="34" charset="0"/>
-                <a:ea typeface="Calibri" pitchFamily="34" charset="-122"/>
-                <a:cs typeface="Calibri" pitchFamily="34" charset="-120"/>
-              </a:rPr>
-              <a:t>not the pressure</a:t>
-            </a:r>
-            <a:pPr indent="0" marL="0">
-              <a:lnSpc>
-                <a:spcPts val="1300"/>
-              </a:lnSpc>
-              <a:buNone/>
-            </a:pPr>
-            <a:r>
-              <a:rPr lang="en-US" sz="1050" dirty="0">
-                <a:solidFill>
-                  <a:srgbClr val="262626"/>
-                </a:solidFill>
-                <a:latin typeface="Calibri" pitchFamily="34" charset="0"/>
-                <a:ea typeface="Calibri" pitchFamily="34" charset="-122"/>
-                <a:cs typeface="Calibri" pitchFamily="34" charset="-120"/>
-              </a:rPr>
-              <a:t>.  The reference bed stops at 0.278 GPa (&lt; σ_y 0.30) = still flowing into voids; the other reaches </a:t>
-            </a:r>
-            <a:pPr indent="0" marL="0">
-              <a:lnSpc>
-                <a:spcPts val="1300"/>
-              </a:lnSpc>
-              <a:buNone/>
-            </a:pPr>
-            <a:r>
-              <a:rPr lang="en-US" sz="1050" b="1" dirty="0">
-                <a:solidFill>
-                  <a:srgbClr val="C00000"/>
-                </a:solidFill>
-                <a:latin typeface="Calibri" pitchFamily="34" charset="0"/>
-                <a:ea typeface="Calibri" pitchFamily="34" charset="-122"/>
-                <a:cs typeface="Calibri" pitchFamily="34" charset="-120"/>
-              </a:rPr>
-              <a:t>1.012 GPa (3.4 × σ_y)</a:t>
-            </a:r>
-            <a:pPr indent="0" marL="0">
-              <a:lnSpc>
-                <a:spcPts val="1300"/>
-              </a:lnSpc>
-              <a:buNone/>
-            </a:pPr>
-            <a:r>
-              <a:rPr lang="en-US" sz="1050" dirty="0">
-                <a:solidFill>
-                  <a:srgbClr val="262626"/>
-                </a:solidFill>
-                <a:latin typeface="Calibri" pitchFamily="34" charset="0"/>
-                <a:ea typeface="Calibri" pitchFamily="34" charset="-122"/>
-                <a:cs typeface="Calibri" pitchFamily="34" charset="-120"/>
-              </a:rPr>
-              <a:t> = pressurised because it cannot reach the remaining voids.  ⇒ the same φ hides a missing degree of freedom: </a:t>
-            </a:r>
-            <a:pPr indent="0" marL="0">
-              <a:lnSpc>
-                <a:spcPts val="1300"/>
-              </a:lnSpc>
-              <a:buNone/>
-            </a:pPr>
-            <a:r>
-              <a:rPr lang="en-US" sz="1050" b="1" dirty="0">
-                <a:solidFill>
-                  <a:srgbClr val="1F4E79"/>
-                </a:solidFill>
-                <a:latin typeface="Calibri" pitchFamily="34" charset="0"/>
-                <a:ea typeface="Calibri" pitchFamily="34" charset="-122"/>
-                <a:cs typeface="Calibri" pitchFamily="34" charset="-120"/>
-              </a:rPr>
-              <a:t>whether the residual void is reachable</a:t>
-            </a:r>
-            <a:pPr indent="0" marL="0">
-              <a:lnSpc>
-                <a:spcPts val="1300"/>
-              </a:lnSpc>
-              <a:buNone/>
-            </a:pPr>
-            <a:r>
-              <a:rPr lang="en-US" sz="1050" dirty="0">
-                <a:solidFill>
-                  <a:srgbClr val="262626"/>
-                </a:solidFill>
-                <a:latin typeface="Calibri" pitchFamily="34" charset="0"/>
-                <a:ea typeface="Calibri" pitchFamily="34" charset="-122"/>
-                <a:cs typeface="Calibri" pitchFamily="34" charset="-120"/>
-              </a:rPr>
-              <a:t>.</a:t>
-            </a:r>
-            <a:endParaRPr lang="en-US" sz="1050" dirty="0"/>
+            <a:pPr algn="ctr" indent="0" marL="0">
+              <a:buNone/>
+            </a:pPr>
+            <a:r>
+              <a:rPr lang="en-US" sz="950" dirty="0">
+                <a:solidFill>
+                  <a:srgbClr val="808080"/>
+                </a:solidFill>
+                <a:latin typeface="Calibri" pitchFamily="34" charset="0"/>
+                <a:ea typeface="Calibri" pitchFamily="34" charset="-122"/>
+                <a:cs typeface="Calibri" pitchFamily="34" charset="-120"/>
+              </a:rPr>
+              <a:t>[Fig] contact-mechanical ~2 % vs chemical CEI ~98 % — three-way split of the fade</a:t>
+            </a:r>
+            <a:endParaRPr lang="en-US" sz="950" dirty="0"/>
           </a:p>
         </p:txBody>
       </p:sp>
       <p:sp>
         <p:nvSpPr>
-          <p:cNvPr id="14" name="Shape 10"/>
+          <p:cNvPr id="13" name="Shape 10"/>
           <p:cNvSpPr/>
           <p:nvPr/>
         </p:nvSpPr>
@@ -11399,7 +10998,7 @@
       </p:sp>
       <p:sp>
         <p:nvSpPr>
-          <p:cNvPr id="15" name="Text 11"/>
+          <p:cNvPr id="14" name="Text 11"/>
           <p:cNvSpPr/>
           <p:nvPr/>
         </p:nvSpPr>
@@ -11430,7 +11029,7 @@
                 <a:ea typeface="Calibri" pitchFamily="34" charset="-122"/>
                 <a:cs typeface="Calibri" pitchFamily="34" charset="-120"/>
               </a:rPr>
-              <a:t>Reporting a rejected assumption is a result: it located a degree of freedom the index could not carry.</a:t>
+              <a:t>The magnitude is anchored to experiment; the shape stays labelled ASSUMED until four cycle points exist.</a:t>
             </a:r>
             <a:endParaRPr lang="en-US" sz="1150" dirty="0"/>
           </a:p>
@@ -11494,6 +11093,1114 @@
                 <a:ea typeface="Arial" pitchFamily="34" charset="-122"/>
                 <a:cs typeface="Arial" pitchFamily="34" charset="-120"/>
               </a:rPr>
+              <a:t>Results and discussion</a:t>
+            </a:r>
+            <a:endParaRPr lang="en-US" sz="2400" dirty="0"/>
+          </a:p>
+        </p:txBody>
+      </p:sp>
+      <p:sp>
+        <p:nvSpPr>
+          <p:cNvPr id="3" name="Shape 1"/>
+          <p:cNvSpPr/>
+          <p:nvPr/>
+        </p:nvSpPr>
+        <p:spPr>
+          <a:xfrm>
+            <a:off x="384048" y="731520"/>
+            <a:ext cx="8375904" cy="0"/>
+          </a:xfrm>
+          <a:prstGeom prst="line">
+            <a:avLst/>
+          </a:prstGeom>
+          <a:noFill/>
+          <a:ln w="12700">
+            <a:solidFill>
+              <a:srgbClr val="404040"/>
+            </a:solidFill>
+            <a:prstDash val="solid"/>
+          </a:ln>
+        </p:spPr>
+      </p:sp>
+      <p:sp>
+        <p:nvSpPr>
+          <p:cNvPr id="4" name="Text 2"/>
+          <p:cNvSpPr/>
+          <p:nvPr/>
+        </p:nvSpPr>
+        <p:spPr>
+          <a:xfrm>
+            <a:off x="4572000" y="768096"/>
+            <a:ext cx="4187952" cy="201168"/>
+          </a:xfrm>
+          <a:prstGeom prst="rect">
+            <a:avLst/>
+          </a:prstGeom>
+          <a:noFill/>
+          <a:ln/>
+        </p:spPr>
+        <p:txBody>
+          <a:bodyPr wrap="square" lIns="0" tIns="0" rIns="0" bIns="0" rtlCol="0" anchor="ctr"/>
+          <a:lstStyle/>
+          <a:p>
+            <a:pPr algn="r" indent="0" marL="0">
+              <a:buNone/>
+            </a:pPr>
+            <a:r>
+              <a:rPr lang="en-US" sz="800" i="1" dirty="0">
+                <a:solidFill>
+                  <a:srgbClr val="808080"/>
+                </a:solidFill>
+                <a:latin typeface="Calibri" pitchFamily="34" charset="0"/>
+                <a:ea typeface="Calibri" pitchFamily="34" charset="-122"/>
+                <a:cs typeface="Calibri" pitchFamily="34" charset="-120"/>
+              </a:rPr>
+              <a:t>this work, Aug 2026 — rejection → mechanism → descriptor → grid check</a:t>
+            </a:r>
+            <a:endParaRPr lang="en-US" sz="800" dirty="0"/>
+          </a:p>
+        </p:txBody>
+      </p:sp>
+      <p:sp>
+        <p:nvSpPr>
+          <p:cNvPr id="5" name="Text 3"/>
+          <p:cNvSpPr/>
+          <p:nvPr/>
+        </p:nvSpPr>
+        <p:spPr>
+          <a:xfrm>
+            <a:off x="384048" y="4800600"/>
+            <a:ext cx="2743200" cy="228600"/>
+          </a:xfrm>
+          <a:prstGeom prst="rect">
+            <a:avLst/>
+          </a:prstGeom>
+          <a:noFill/>
+          <a:ln/>
+        </p:spPr>
+        <p:txBody>
+          <a:bodyPr wrap="square" lIns="0" tIns="0" rIns="0" bIns="0" rtlCol="0" anchor="ctr"/>
+          <a:lstStyle/>
+          <a:p>
+            <a:pPr indent="0" marL="0">
+              <a:buNone/>
+            </a:pPr>
+            <a:r>
+              <a:rPr lang="en-US" sz="900" dirty="0">
+                <a:solidFill>
+                  <a:srgbClr val="A6A6A6"/>
+                </a:solidFill>
+                <a:latin typeface="Calibri" pitchFamily="34" charset="0"/>
+                <a:ea typeface="Calibri" pitchFamily="34" charset="-122"/>
+                <a:cs typeface="Calibri" pitchFamily="34" charset="-120"/>
+              </a:rPr>
+              <a:t>Battery Materials Lab.</a:t>
+            </a:r>
+            <a:endParaRPr lang="en-US" sz="900" dirty="0"/>
+          </a:p>
+        </p:txBody>
+      </p:sp>
+      <p:sp>
+        <p:nvSpPr>
+          <p:cNvPr id="6" name="Text 4"/>
+          <p:cNvSpPr/>
+          <p:nvPr/>
+        </p:nvSpPr>
+        <p:spPr>
+          <a:xfrm>
+            <a:off x="8229600" y="4800600"/>
+            <a:ext cx="530352" cy="228600"/>
+          </a:xfrm>
+          <a:prstGeom prst="rect">
+            <a:avLst/>
+          </a:prstGeom>
+          <a:noFill/>
+          <a:ln/>
+        </p:spPr>
+        <p:txBody>
+          <a:bodyPr wrap="square" lIns="0" tIns="0" rIns="0" bIns="0" rtlCol="0" anchor="ctr"/>
+          <a:lstStyle/>
+          <a:p>
+            <a:pPr algn="r" indent="0" marL="0">
+              <a:buNone/>
+            </a:pPr>
+            <a:r>
+              <a:rPr lang="en-US" sz="900" dirty="0">
+                <a:solidFill>
+                  <a:srgbClr val="A6A6A6"/>
+                </a:solidFill>
+                <a:latin typeface="Calibri" pitchFamily="34" charset="0"/>
+                <a:ea typeface="Calibri" pitchFamily="34" charset="-122"/>
+                <a:cs typeface="Calibri" pitchFamily="34" charset="-120"/>
+              </a:rPr>
+              <a:t>14</a:t>
+            </a:r>
+            <a:endParaRPr lang="en-US" sz="900" dirty="0"/>
+          </a:p>
+        </p:txBody>
+      </p:sp>
+      <p:sp>
+        <p:nvSpPr>
+          <p:cNvPr id="7" name="Text 5"/>
+          <p:cNvSpPr/>
+          <p:nvPr/>
+        </p:nvSpPr>
+        <p:spPr>
+          <a:xfrm>
+            <a:off x="502920" y="914400"/>
+            <a:ext cx="8138160" cy="731520"/>
+          </a:xfrm>
+          <a:prstGeom prst="rect">
+            <a:avLst/>
+          </a:prstGeom>
+          <a:noFill/>
+          <a:ln/>
+        </p:spPr>
+        <p:txBody>
+          <a:bodyPr wrap="square" lIns="0" tIns="0" rIns="0" bIns="0" rtlCol="0" anchor="t"/>
+          <a:lstStyle/>
+          <a:p>
+            <a:pPr indent="0" marL="0">
+              <a:lnSpc>
+                <a:spcPts val="1800"/>
+              </a:lnSpc>
+              <a:spcAft>
+                <a:spcPts val="500"/>
+              </a:spcAft>
+              <a:buNone/>
+            </a:pPr>
+            <a:r>
+              <a:rPr lang="en-US" sz="1400" b="1" dirty="0">
+                <a:solidFill>
+                  <a:srgbClr val="C00000"/>
+                </a:solidFill>
+                <a:latin typeface="Calibri" pitchFamily="34" charset="0"/>
+                <a:ea typeface="Calibri" pitchFamily="34" charset="-122"/>
+                <a:cs typeface="Calibri" pitchFamily="34" charset="-120"/>
+              </a:rPr>
+              <a:t>■  </a:t>
+            </a:r>
+            <a:pPr indent="0" marL="0">
+              <a:lnSpc>
+                <a:spcPts val="1800"/>
+              </a:lnSpc>
+              <a:spcAft>
+                <a:spcPts val="500"/>
+              </a:spcAft>
+              <a:buNone/>
+            </a:pPr>
+            <a:r>
+              <a:rPr lang="en-US" sz="1400" b="1" dirty="0">
+                <a:solidFill>
+                  <a:srgbClr val="262626"/>
+                </a:solidFill>
+                <a:latin typeface="Calibri" pitchFamily="34" charset="0"/>
+                <a:ea typeface="Calibri" pitchFamily="34" charset="-122"/>
+                <a:cs typeface="Calibri" pitchFamily="34" charset="-120"/>
+              </a:rPr>
+              <a:t>A rejected assumption, traced to its cause — and then to a one-number fix</a:t>
+            </a:r>
+            <a:endParaRPr lang="en-US" sz="1400" dirty="0"/>
+          </a:p>
+          <a:p>
+            <a:pPr indent="0" marL="0">
+              <a:lnSpc>
+                <a:spcPts val="1800"/>
+              </a:lnSpc>
+              <a:spcAft>
+                <a:spcPts val="500"/>
+              </a:spcAft>
+              <a:buNone/>
+            </a:pPr>
+            <a:r>
+              <a:rPr lang="en-US" sz="1300" dirty="0">
+                <a:solidFill>
+                  <a:srgbClr val="808080"/>
+                </a:solidFill>
+                <a:latin typeface="Calibri" pitchFamily="34" charset="0"/>
+                <a:ea typeface="Calibri" pitchFamily="34" charset="-122"/>
+                <a:cs typeface="Calibri" pitchFamily="34" charset="-120"/>
+              </a:rPr>
+              <a:t>     ·   </a:t>
+            </a:r>
+            <a:pPr indent="0" marL="0">
+              <a:lnSpc>
+                <a:spcPts val="1800"/>
+              </a:lnSpc>
+              <a:spcAft>
+                <a:spcPts val="500"/>
+              </a:spcAft>
+              <a:buNone/>
+            </a:pPr>
+            <a:r>
+              <a:rPr lang="en-US" sz="1300" dirty="0">
+                <a:solidFill>
+                  <a:srgbClr val="262626"/>
+                </a:solidFill>
+                <a:latin typeface="Calibri" pitchFamily="34" charset="0"/>
+                <a:ea typeface="Calibri" pitchFamily="34" charset="-122"/>
+                <a:cs typeface="Calibri" pitchFamily="34" charset="-120"/>
+              </a:rPr>
+              <a:t>We indexed the SE stress response by </a:t>
+            </a:r>
+            <a:pPr indent="0" marL="0">
+              <a:lnSpc>
+                <a:spcPts val="1800"/>
+              </a:lnSpc>
+              <a:spcAft>
+                <a:spcPts val="500"/>
+              </a:spcAft>
+              <a:buNone/>
+            </a:pPr>
+            <a:r>
+              <a:rPr lang="en-US" sz="1300" b="1" dirty="0">
+                <a:solidFill>
+                  <a:srgbClr val="262626"/>
+                </a:solidFill>
+                <a:latin typeface="Calibri" pitchFamily="34" charset="0"/>
+                <a:ea typeface="Calibri" pitchFamily="34" charset="-122"/>
+                <a:cs typeface="Calibri" pitchFamily="34" charset="-120"/>
+              </a:rPr>
+              <a:t>phi = V_SE /(A*h - V_AM)</a:t>
+            </a:r>
+            <a:pPr indent="0" marL="0">
+              <a:lnSpc>
+                <a:spcPts val="1800"/>
+              </a:lnSpc>
+              <a:spcAft>
+                <a:spcPts val="500"/>
+              </a:spcAft>
+              <a:buNone/>
+            </a:pPr>
+            <a:r>
+              <a:rPr lang="en-US" sz="1300" dirty="0">
+                <a:solidFill>
+                  <a:srgbClr val="262626"/>
+                </a:solidFill>
+                <a:latin typeface="Calibri" pitchFamily="34" charset="0"/>
+                <a:ea typeface="Calibri" pitchFamily="34" charset="-122"/>
+                <a:cs typeface="Calibri" pitchFamily="34" charset="-120"/>
+              </a:rPr>
+              <a:t> ("how full is the SE’s own space") and assumed one curve would serve every electrode.  Measured at matched loading rate, </a:t>
+            </a:r>
+            <a:pPr indent="0" marL="0">
+              <a:lnSpc>
+                <a:spcPts val="1800"/>
+              </a:lnSpc>
+              <a:spcAft>
+                <a:spcPts val="500"/>
+              </a:spcAft>
+              <a:buNone/>
+            </a:pPr>
+            <a:r>
+              <a:rPr lang="en-US" sz="1300" b="1" dirty="0">
+                <a:solidFill>
+                  <a:srgbClr val="C00000"/>
+                </a:solidFill>
+                <a:latin typeface="Calibri" pitchFamily="34" charset="0"/>
+                <a:ea typeface="Calibri" pitchFamily="34" charset="-122"/>
+                <a:cs typeface="Calibri" pitchFamily="34" charset="-120"/>
+              </a:rPr>
+              <a:t>it does not: 2.96 - 3.83x at the same phi</a:t>
+            </a:r>
+            <a:pPr indent="0" marL="0">
+              <a:lnSpc>
+                <a:spcPts val="1800"/>
+              </a:lnSpc>
+              <a:spcAft>
+                <a:spcPts val="500"/>
+              </a:spcAft>
+              <a:buNone/>
+            </a:pPr>
+            <a:r>
+              <a:rPr lang="en-US" sz="1300" dirty="0">
+                <a:solidFill>
+                  <a:srgbClr val="262626"/>
+                </a:solidFill>
+                <a:latin typeface="Calibri" pitchFamily="34" charset="0"/>
+                <a:ea typeface="Calibri" pitchFamily="34" charset="-122"/>
+                <a:cs typeface="Calibri" pitchFamily="34" charset="-120"/>
+              </a:rPr>
+              <a:t>.</a:t>
+            </a:r>
+            <a:endParaRPr lang="en-US" sz="1400" dirty="0"/>
+          </a:p>
+        </p:txBody>
+      </p:sp>
+      <p:graphicFrame>
+        <p:nvGraphicFramePr>
+          <p:cNvPr id="8" name="Chart 0" descr=""/>
+          <p:cNvGraphicFramePr/>
+          <p:nvPr/>
+        </p:nvGraphicFramePr>
+        <p:xfrm>
+          <a:off x="502920" y="1783080"/>
+          <a:ext cx="3931920" cy="2286000"/>
+        </p:xfrm>
+        <a:graphic xmlns:a="http://schemas.openxmlformats.org/drawingml/2006/main">
+          <a:graphicData uri="http://schemas.openxmlformats.org/drawingml/2006/chart">
+            <c:chart xmlns:c="http://schemas.openxmlformats.org/drawingml/2006/chart" r:id="rId1"/>
+          </a:graphicData>
+        </a:graphic>
+      </p:graphicFrame>
+      <p:sp>
+        <p:nvSpPr>
+          <p:cNvPr id="9" name="Text 6"/>
+          <p:cNvSpPr/>
+          <p:nvPr/>
+        </p:nvSpPr>
+        <p:spPr>
+          <a:xfrm>
+            <a:off x="4572000" y="1783080"/>
+            <a:ext cx="4114800" cy="2331720"/>
+          </a:xfrm>
+          <a:prstGeom prst="rect">
+            <a:avLst/>
+          </a:prstGeom>
+          <a:noFill/>
+          <a:ln/>
+        </p:spPr>
+        <p:txBody>
+          <a:bodyPr wrap="square" lIns="0" tIns="0" rIns="0" bIns="0" rtlCol="0" anchor="t"/>
+          <a:lstStyle/>
+          <a:p>
+            <a:pPr indent="0" marL="0">
+              <a:lnSpc>
+                <a:spcPts val="1800"/>
+              </a:lnSpc>
+              <a:spcAft>
+                <a:spcPts val="500"/>
+              </a:spcAft>
+              <a:buNone/>
+            </a:pPr>
+            <a:r>
+              <a:rPr lang="en-US" sz="1000" dirty="0">
+                <a:solidFill>
+                  <a:srgbClr val="808080"/>
+                </a:solidFill>
+                <a:latin typeface="Calibri" pitchFamily="34" charset="0"/>
+                <a:ea typeface="Calibri" pitchFamily="34" charset="-122"/>
+                <a:cs typeface="Calibri" pitchFamily="34" charset="-120"/>
+              </a:rPr>
+              <a:t>     ·   </a:t>
+            </a:r>
+            <a:pPr indent="0" marL="0">
+              <a:lnSpc>
+                <a:spcPts val="1800"/>
+              </a:lnSpc>
+              <a:spcAft>
+                <a:spcPts val="500"/>
+              </a:spcAft>
+              <a:buNone/>
+            </a:pPr>
+            <a:r>
+              <a:rPr lang="en-US" sz="1000" dirty="0">
+                <a:solidFill>
+                  <a:srgbClr val="262626"/>
+                </a:solidFill>
+                <a:latin typeface="Calibri" pitchFamily="34" charset="0"/>
+                <a:ea typeface="Calibri" pitchFamily="34" charset="-122"/>
+                <a:cs typeface="Calibri" pitchFamily="34" charset="-120"/>
+              </a:rPr>
+              <a:t>1. </a:t>
+            </a:r>
+            <a:pPr indent="0" marL="0">
+              <a:lnSpc>
+                <a:spcPts val="1800"/>
+              </a:lnSpc>
+              <a:spcAft>
+                <a:spcPts val="500"/>
+              </a:spcAft>
+              <a:buNone/>
+            </a:pPr>
+            <a:r>
+              <a:rPr lang="en-US" sz="1000" b="1" dirty="0">
+                <a:solidFill>
+                  <a:srgbClr val="2E74B5"/>
+                </a:solidFill>
+                <a:latin typeface="Calibri" pitchFamily="34" charset="0"/>
+                <a:ea typeface="Calibri" pitchFamily="34" charset="-122"/>
+                <a:cs typeface="Calibri" pitchFamily="34" charset="-120"/>
+              </a:rPr>
+              <a:t>Mechanism</a:t>
+            </a:r>
+            <a:pPr indent="0" marL="0">
+              <a:lnSpc>
+                <a:spcPts val="1800"/>
+              </a:lnSpc>
+              <a:spcAft>
+                <a:spcPts val="500"/>
+              </a:spcAft>
+              <a:buNone/>
+            </a:pPr>
+            <a:r>
+              <a:rPr lang="en-US" sz="1000" dirty="0">
+                <a:solidFill>
+                  <a:srgbClr val="262626"/>
+                </a:solidFill>
+                <a:latin typeface="Calibri" pitchFamily="34" charset="0"/>
+                <a:ea typeface="Calibri" pitchFamily="34" charset="-122"/>
+                <a:cs typeface="Calibri" pitchFamily="34" charset="-120"/>
+              </a:rPr>
+              <a:t> — von Mises caps only the shape-changing stress, </a:t>
+            </a:r>
+            <a:pPr indent="0" marL="0">
+              <a:lnSpc>
+                <a:spcPts val="1800"/>
+              </a:lnSpc>
+              <a:spcAft>
+                <a:spcPts val="500"/>
+              </a:spcAft>
+              <a:buNone/>
+            </a:pPr>
+            <a:r>
+              <a:rPr lang="en-US" sz="1000" b="1" dirty="0">
+                <a:solidFill>
+                  <a:srgbClr val="C00000"/>
+                </a:solidFill>
+                <a:latin typeface="Calibri" pitchFamily="34" charset="0"/>
+                <a:ea typeface="Calibri" pitchFamily="34" charset="-122"/>
+                <a:cs typeface="Calibri" pitchFamily="34" charset="-120"/>
+              </a:rPr>
+              <a:t>not the pressure</a:t>
+            </a:r>
+            <a:pPr indent="0" marL="0">
+              <a:lnSpc>
+                <a:spcPts val="1800"/>
+              </a:lnSpc>
+              <a:spcAft>
+                <a:spcPts val="500"/>
+              </a:spcAft>
+              <a:buNone/>
+            </a:pPr>
+            <a:r>
+              <a:rPr lang="en-US" sz="1000" dirty="0">
+                <a:solidFill>
+                  <a:srgbClr val="262626"/>
+                </a:solidFill>
+                <a:latin typeface="Calibri" pitchFamily="34" charset="0"/>
+                <a:ea typeface="Calibri" pitchFamily="34" charset="-122"/>
+                <a:cs typeface="Calibri" pitchFamily="34" charset="-120"/>
+              </a:rPr>
+              <a:t>.  One bed stops at 0.278 GPa (below the 0.30 yield) = still flowing into voids; the other reaches </a:t>
+            </a:r>
+            <a:pPr indent="0" marL="0">
+              <a:lnSpc>
+                <a:spcPts val="1800"/>
+              </a:lnSpc>
+              <a:spcAft>
+                <a:spcPts val="500"/>
+              </a:spcAft>
+              <a:buNone/>
+            </a:pPr>
+            <a:r>
+              <a:rPr lang="en-US" sz="1000" b="1" dirty="0">
+                <a:solidFill>
+                  <a:srgbClr val="C00000"/>
+                </a:solidFill>
+                <a:latin typeface="Calibri" pitchFamily="34" charset="0"/>
+                <a:ea typeface="Calibri" pitchFamily="34" charset="-122"/>
+                <a:cs typeface="Calibri" pitchFamily="34" charset="-120"/>
+              </a:rPr>
+              <a:t>1.012 GPa (3.4x yield)</a:t>
+            </a:r>
+            <a:pPr indent="0" marL="0">
+              <a:lnSpc>
+                <a:spcPts val="1800"/>
+              </a:lnSpc>
+              <a:spcAft>
+                <a:spcPts val="500"/>
+              </a:spcAft>
+              <a:buNone/>
+            </a:pPr>
+            <a:r>
+              <a:rPr lang="en-US" sz="1000" dirty="0">
+                <a:solidFill>
+                  <a:srgbClr val="262626"/>
+                </a:solidFill>
+                <a:latin typeface="Calibri" pitchFamily="34" charset="0"/>
+                <a:ea typeface="Calibri" pitchFamily="34" charset="-122"/>
+                <a:cs typeface="Calibri" pitchFamily="34" charset="-120"/>
+              </a:rPr>
+              <a:t> = pressurised, unable to reach the remaining voids.</a:t>
+            </a:r>
+            <a:endParaRPr lang="en-US" sz="1000" dirty="0"/>
+          </a:p>
+          <a:p>
+            <a:pPr indent="0" marL="0">
+              <a:lnSpc>
+                <a:spcPts val="1800"/>
+              </a:lnSpc>
+              <a:spcAft>
+                <a:spcPts val="500"/>
+              </a:spcAft>
+              <a:buNone/>
+            </a:pPr>
+            <a:r>
+              <a:rPr lang="en-US" sz="1000" dirty="0">
+                <a:solidFill>
+                  <a:srgbClr val="808080"/>
+                </a:solidFill>
+                <a:latin typeface="Calibri" pitchFamily="34" charset="0"/>
+                <a:ea typeface="Calibri" pitchFamily="34" charset="-122"/>
+                <a:cs typeface="Calibri" pitchFamily="34" charset="-120"/>
+              </a:rPr>
+              <a:t>     ·   </a:t>
+            </a:r>
+            <a:pPr indent="0" marL="0">
+              <a:lnSpc>
+                <a:spcPts val="1800"/>
+              </a:lnSpc>
+              <a:spcAft>
+                <a:spcPts val="500"/>
+              </a:spcAft>
+              <a:buNone/>
+            </a:pPr>
+            <a:r>
+              <a:rPr lang="en-US" sz="1000" dirty="0">
+                <a:solidFill>
+                  <a:srgbClr val="262626"/>
+                </a:solidFill>
+                <a:latin typeface="Calibri" pitchFamily="34" charset="0"/>
+                <a:ea typeface="Calibri" pitchFamily="34" charset="-122"/>
+                <a:cs typeface="Calibri" pitchFamily="34" charset="-120"/>
+              </a:rPr>
+              <a:t>2. </a:t>
+            </a:r>
+            <a:pPr indent="0" marL="0">
+              <a:lnSpc>
+                <a:spcPts val="1800"/>
+              </a:lnSpc>
+              <a:spcAft>
+                <a:spcPts val="500"/>
+              </a:spcAft>
+              <a:buNone/>
+            </a:pPr>
+            <a:r>
+              <a:rPr lang="en-US" sz="1000" b="1" dirty="0">
+                <a:solidFill>
+                  <a:srgbClr val="2E74B5"/>
+                </a:solidFill>
+                <a:latin typeface="Calibri" pitchFamily="34" charset="0"/>
+                <a:ea typeface="Calibri" pitchFamily="34" charset="-122"/>
+                <a:cs typeface="Calibri" pitchFamily="34" charset="-120"/>
+              </a:rPr>
+              <a:t>The cause is composition, not thickness</a:t>
+            </a:r>
+            <a:pPr indent="0" marL="0">
+              <a:lnSpc>
+                <a:spcPts val="1800"/>
+              </a:lnSpc>
+              <a:spcAft>
+                <a:spcPts val="500"/>
+              </a:spcAft>
+              <a:buNone/>
+            </a:pPr>
+            <a:r>
+              <a:rPr lang="en-US" sz="1000" dirty="0">
+                <a:solidFill>
+                  <a:srgbClr val="262626"/>
+                </a:solidFill>
+                <a:latin typeface="Calibri" pitchFamily="34" charset="0"/>
+                <a:ea typeface="Calibri" pitchFamily="34" charset="-122"/>
+                <a:cs typeface="Calibri" pitchFamily="34" charset="-120"/>
+              </a:rPr>
+              <a:t> — five beds matched to +/-1.4 % in thickness, only the particle-size ratio varied, give </a:t>
+            </a:r>
+            <a:pPr indent="0" marL="0">
+              <a:lnSpc>
+                <a:spcPts val="1800"/>
+              </a:lnSpc>
+              <a:spcAft>
+                <a:spcPts val="500"/>
+              </a:spcAft>
+              <a:buNone/>
+            </a:pPr>
+            <a:r>
+              <a:rPr lang="en-US" sz="1000" b="1" dirty="0">
+                <a:solidFill>
+                  <a:srgbClr val="262626"/>
+                </a:solidFill>
+                <a:latin typeface="Calibri" pitchFamily="34" charset="0"/>
+                <a:ea typeface="Calibri" pitchFamily="34" charset="-122"/>
+                <a:cs typeface="Calibri" pitchFamily="34" charset="-120"/>
+              </a:rPr>
+              <a:t>1.87x</a:t>
+            </a:r>
+            <a:pPr indent="0" marL="0">
+              <a:lnSpc>
+                <a:spcPts val="1800"/>
+              </a:lnSpc>
+              <a:spcAft>
+                <a:spcPts val="500"/>
+              </a:spcAft>
+              <a:buNone/>
+            </a:pPr>
+            <a:r>
+              <a:rPr lang="en-US" sz="1000" dirty="0">
+                <a:solidFill>
+                  <a:srgbClr val="262626"/>
+                </a:solidFill>
+                <a:latin typeface="Calibri" pitchFamily="34" charset="0"/>
+                <a:ea typeface="Calibri" pitchFamily="34" charset="-122"/>
+                <a:cs typeface="Calibri" pitchFamily="34" charset="-120"/>
+              </a:rPr>
+              <a:t>, </a:t>
+            </a:r>
+            <a:pPr indent="0" marL="0">
+              <a:lnSpc>
+                <a:spcPts val="1800"/>
+              </a:lnSpc>
+              <a:spcAft>
+                <a:spcPts val="500"/>
+              </a:spcAft>
+              <a:buNone/>
+            </a:pPr>
+            <a:r>
+              <a:rPr lang="en-US" sz="1000" b="1" dirty="0">
+                <a:solidFill>
+                  <a:srgbClr val="262626"/>
+                </a:solidFill>
+                <a:latin typeface="Calibri" pitchFamily="34" charset="0"/>
+                <a:ea typeface="Calibri" pitchFamily="34" charset="-122"/>
+                <a:cs typeface="Calibri" pitchFamily="34" charset="-120"/>
+              </a:rPr>
+              <a:t>perfectly monotonic</a:t>
+            </a:r>
+            <a:pPr indent="0" marL="0">
+              <a:lnSpc>
+                <a:spcPts val="1800"/>
+              </a:lnSpc>
+              <a:spcAft>
+                <a:spcPts val="500"/>
+              </a:spcAft>
+              <a:buNone/>
+            </a:pPr>
+            <a:r>
+              <a:rPr lang="en-US" sz="1000" dirty="0">
+                <a:solidFill>
+                  <a:srgbClr val="262626"/>
+                </a:solidFill>
+                <a:latin typeface="Calibri" pitchFamily="34" charset="0"/>
+                <a:ea typeface="Calibri" pitchFamily="34" charset="-122"/>
+                <a:cs typeface="Calibri" pitchFamily="34" charset="-120"/>
+              </a:rPr>
+              <a:t> in that ratio (by chance about 7e-5).</a:t>
+            </a:r>
+            <a:endParaRPr lang="en-US" sz="1000" dirty="0"/>
+          </a:p>
+          <a:p>
+            <a:pPr indent="0" marL="0">
+              <a:lnSpc>
+                <a:spcPts val="1800"/>
+              </a:lnSpc>
+              <a:spcAft>
+                <a:spcPts val="500"/>
+              </a:spcAft>
+              <a:buNone/>
+            </a:pPr>
+            <a:r>
+              <a:rPr lang="en-US" sz="1000" dirty="0">
+                <a:solidFill>
+                  <a:srgbClr val="808080"/>
+                </a:solidFill>
+                <a:latin typeface="Calibri" pitchFamily="34" charset="0"/>
+                <a:ea typeface="Calibri" pitchFamily="34" charset="-122"/>
+                <a:cs typeface="Calibri" pitchFamily="34" charset="-120"/>
+              </a:rPr>
+              <a:t>     ·   </a:t>
+            </a:r>
+            <a:pPr indent="0" marL="0">
+              <a:lnSpc>
+                <a:spcPts val="1800"/>
+              </a:lnSpc>
+              <a:spcAft>
+                <a:spcPts val="500"/>
+              </a:spcAft>
+              <a:buNone/>
+            </a:pPr>
+            <a:r>
+              <a:rPr lang="en-US" sz="1000" dirty="0">
+                <a:solidFill>
+                  <a:srgbClr val="262626"/>
+                </a:solidFill>
+                <a:latin typeface="Calibri" pitchFamily="34" charset="0"/>
+                <a:ea typeface="Calibri" pitchFamily="34" charset="-122"/>
+                <a:cs typeface="Calibri" pitchFamily="34" charset="-120"/>
+              </a:rPr>
+              <a:t>3. </a:t>
+            </a:r>
+            <a:pPr indent="0" marL="0">
+              <a:lnSpc>
+                <a:spcPts val="1800"/>
+              </a:lnSpc>
+              <a:spcAft>
+                <a:spcPts val="500"/>
+              </a:spcAft>
+              <a:buNone/>
+            </a:pPr>
+            <a:r>
+              <a:rPr lang="en-US" sz="1000" b="1" dirty="0">
+                <a:solidFill>
+                  <a:srgbClr val="2E74B5"/>
+                </a:solidFill>
+                <a:latin typeface="Calibri" pitchFamily="34" charset="0"/>
+                <a:ea typeface="Calibri" pitchFamily="34" charset="-122"/>
+                <a:cs typeface="Calibri" pitchFamily="34" charset="-120"/>
+              </a:rPr>
+              <a:t>The fix</a:t>
+            </a:r>
+            <a:pPr indent="0" marL="0">
+              <a:lnSpc>
+                <a:spcPts val="1800"/>
+              </a:lnSpc>
+              <a:spcAft>
+                <a:spcPts val="500"/>
+              </a:spcAft>
+              <a:buNone/>
+            </a:pPr>
+            <a:r>
+              <a:rPr lang="en-US" sz="1000" dirty="0">
+                <a:solidFill>
+                  <a:srgbClr val="262626"/>
+                </a:solidFill>
+                <a:latin typeface="Calibri" pitchFamily="34" charset="0"/>
+                <a:ea typeface="Calibri" pitchFamily="34" charset="-122"/>
+                <a:cs typeface="Calibri" pitchFamily="34" charset="-120"/>
+              </a:rPr>
+              <a:t> — index by channel width instead:  </a:t>
+            </a:r>
+            <a:pPr indent="0" marL="0">
+              <a:lnSpc>
+                <a:spcPts val="1800"/>
+              </a:lnSpc>
+              <a:spcAft>
+                <a:spcPts val="500"/>
+              </a:spcAft>
+              <a:buNone/>
+            </a:pPr>
+            <a:r>
+              <a:rPr lang="en-US" sz="1000" b="1" dirty="0">
+                <a:solidFill>
+                  <a:srgbClr val="262626"/>
+                </a:solidFill>
+                <a:latin typeface="Calibri" pitchFamily="34" charset="0"/>
+                <a:ea typeface="Calibri" pitchFamily="34" charset="-122"/>
+                <a:cs typeface="Calibri" pitchFamily="34" charset="-120"/>
+              </a:rPr>
+              <a:t>sigma proportional to d_h^-0.54,  R2 = 0.935</a:t>
+            </a:r>
+            <a:pPr indent="0" marL="0">
+              <a:lnSpc>
+                <a:spcPts val="1800"/>
+              </a:lnSpc>
+              <a:spcAft>
+                <a:spcPts val="500"/>
+              </a:spcAft>
+              <a:buNone/>
+            </a:pPr>
+            <a:r>
+              <a:rPr lang="en-US" sz="1000" dirty="0">
+                <a:solidFill>
+                  <a:srgbClr val="262626"/>
+                </a:solidFill>
+                <a:latin typeface="Calibri" pitchFamily="34" charset="0"/>
+                <a:ea typeface="Calibri" pitchFamily="34" charset="-122"/>
+                <a:cs typeface="Calibri" pitchFamily="34" charset="-120"/>
+              </a:rPr>
+              <a:t>.  A new electrode then needs only its d_h, not a new five-point curve.</a:t>
+            </a:r>
+            <a:endParaRPr lang="en-US" sz="1000" dirty="0"/>
+          </a:p>
+          <a:p>
+            <a:pPr indent="0" marL="0">
+              <a:lnSpc>
+                <a:spcPts val="1800"/>
+              </a:lnSpc>
+              <a:spcAft>
+                <a:spcPts val="500"/>
+              </a:spcAft>
+              <a:buNone/>
+            </a:pPr>
+            <a:r>
+              <a:rPr lang="en-US" sz="1000" dirty="0">
+                <a:solidFill>
+                  <a:srgbClr val="808080"/>
+                </a:solidFill>
+                <a:latin typeface="Calibri" pitchFamily="34" charset="0"/>
+                <a:ea typeface="Calibri" pitchFamily="34" charset="-122"/>
+                <a:cs typeface="Calibri" pitchFamily="34" charset="-120"/>
+              </a:rPr>
+              <a:t>     ·   </a:t>
+            </a:r>
+            <a:pPr indent="0" marL="0">
+              <a:lnSpc>
+                <a:spcPts val="1800"/>
+              </a:lnSpc>
+              <a:spcAft>
+                <a:spcPts val="500"/>
+              </a:spcAft>
+              <a:buNone/>
+            </a:pPr>
+            <a:r>
+              <a:rPr lang="en-US" sz="1000" dirty="0">
+                <a:solidFill>
+                  <a:srgbClr val="262626"/>
+                </a:solidFill>
+                <a:latin typeface="Calibri" pitchFamily="34" charset="0"/>
+                <a:ea typeface="Calibri" pitchFamily="34" charset="-122"/>
+                <a:cs typeface="Calibri" pitchFamily="34" charset="-120"/>
+              </a:rPr>
+              <a:t>4. </a:t>
+            </a:r>
+            <a:pPr indent="0" marL="0">
+              <a:lnSpc>
+                <a:spcPts val="1800"/>
+              </a:lnSpc>
+              <a:spcAft>
+                <a:spcPts val="500"/>
+              </a:spcAft>
+              <a:buNone/>
+            </a:pPr>
+            <a:r>
+              <a:rPr lang="en-US" sz="1000" b="1" dirty="0">
+                <a:solidFill>
+                  <a:srgbClr val="2E74B5"/>
+                </a:solidFill>
+                <a:latin typeface="Calibri" pitchFamily="34" charset="0"/>
+                <a:ea typeface="Calibri" pitchFamily="34" charset="-122"/>
+                <a:cs typeface="Calibri" pitchFamily="34" charset="-120"/>
+              </a:rPr>
+              <a:t>Not a grid artefact</a:t>
+            </a:r>
+            <a:pPr indent="0" marL="0">
+              <a:lnSpc>
+                <a:spcPts val="1800"/>
+              </a:lnSpc>
+              <a:spcAft>
+                <a:spcPts val="500"/>
+              </a:spcAft>
+              <a:buNone/>
+            </a:pPr>
+            <a:r>
+              <a:rPr lang="en-US" sz="1000" dirty="0">
+                <a:solidFill>
+                  <a:srgbClr val="262626"/>
+                </a:solidFill>
+                <a:latin typeface="Calibri" pitchFamily="34" charset="0"/>
+                <a:ea typeface="Calibri" pitchFamily="34" charset="-122"/>
+                <a:cs typeface="Calibri" pitchFamily="34" charset="-120"/>
+              </a:rPr>
+              <a:t> — refining the grid </a:t>
+            </a:r>
+            <a:pPr indent="0" marL="0">
+              <a:lnSpc>
+                <a:spcPts val="1800"/>
+              </a:lnSpc>
+              <a:spcAft>
+                <a:spcPts val="500"/>
+              </a:spcAft>
+              <a:buNone/>
+            </a:pPr>
+            <a:r>
+              <a:rPr lang="en-US" sz="1000" b="1" dirty="0">
+                <a:solidFill>
+                  <a:srgbClr val="262626"/>
+                </a:solidFill>
+                <a:latin typeface="Calibri" pitchFamily="34" charset="0"/>
+                <a:ea typeface="Calibri" pitchFamily="34" charset="-122"/>
+                <a:cs typeface="Calibri" pitchFamily="34" charset="-120"/>
+              </a:rPr>
+              <a:t>strengthens</a:t>
+            </a:r>
+            <a:pPr indent="0" marL="0">
+              <a:lnSpc>
+                <a:spcPts val="1800"/>
+              </a:lnSpc>
+              <a:spcAft>
+                <a:spcPts val="500"/>
+              </a:spcAft>
+              <a:buNone/>
+            </a:pPr>
+            <a:r>
+              <a:rPr lang="en-US" sz="1000" dirty="0">
+                <a:solidFill>
+                  <a:srgbClr val="262626"/>
+                </a:solidFill>
+                <a:latin typeface="Calibri" pitchFamily="34" charset="0"/>
+                <a:ea typeface="Calibri" pitchFamily="34" charset="-122"/>
+                <a:cs typeface="Calibri" pitchFamily="34" charset="-120"/>
+              </a:rPr>
+              <a:t> the effect (+5-10 %): an unresolved constriction simply vanishes and lets material through.  So -0.54 is a </a:t>
+            </a:r>
+            <a:pPr indent="0" marL="0">
+              <a:lnSpc>
+                <a:spcPts val="1800"/>
+              </a:lnSpc>
+              <a:spcAft>
+                <a:spcPts val="500"/>
+              </a:spcAft>
+              <a:buNone/>
+            </a:pPr>
+            <a:r>
+              <a:rPr lang="en-US" sz="1000" b="1" dirty="0">
+                <a:solidFill>
+                  <a:srgbClr val="262626"/>
+                </a:solidFill>
+                <a:latin typeface="Calibri" pitchFamily="34" charset="0"/>
+                <a:ea typeface="Calibri" pitchFamily="34" charset="-122"/>
+                <a:cs typeface="Calibri" pitchFamily="34" charset="-120"/>
+              </a:rPr>
+              <a:t>lower bound</a:t>
+            </a:r>
+            <a:pPr indent="0" marL="0">
+              <a:lnSpc>
+                <a:spcPts val="1800"/>
+              </a:lnSpc>
+              <a:spcAft>
+                <a:spcPts val="500"/>
+              </a:spcAft>
+              <a:buNone/>
+            </a:pPr>
+            <a:r>
+              <a:rPr lang="en-US" sz="1000" dirty="0">
+                <a:solidFill>
+                  <a:srgbClr val="262626"/>
+                </a:solidFill>
+                <a:latin typeface="Calibri" pitchFamily="34" charset="0"/>
+                <a:ea typeface="Calibri" pitchFamily="34" charset="-122"/>
+                <a:cs typeface="Calibri" pitchFamily="34" charset="-120"/>
+              </a:rPr>
+              <a:t> on the magnitude.</a:t>
+            </a:r>
+            <a:endParaRPr lang="en-US" sz="1000" dirty="0"/>
+          </a:p>
+        </p:txBody>
+      </p:sp>
+      <p:sp>
+        <p:nvSpPr>
+          <p:cNvPr id="10" name="Shape 7"/>
+          <p:cNvSpPr/>
+          <p:nvPr/>
+        </p:nvSpPr>
+        <p:spPr>
+          <a:xfrm>
+            <a:off x="502920" y="4224528"/>
+            <a:ext cx="8138160" cy="475488"/>
+          </a:xfrm>
+          <a:prstGeom prst="roundRect">
+            <a:avLst>
+              <a:gd name="adj" fmla="val 11538"/>
+            </a:avLst>
+          </a:prstGeom>
+          <a:solidFill>
+            <a:srgbClr val="EAF1F8"/>
+          </a:solidFill>
+          <a:ln w="9525">
+            <a:solidFill>
+              <a:srgbClr val="2E74B5"/>
+            </a:solidFill>
+            <a:prstDash val="solid"/>
+          </a:ln>
+        </p:spPr>
+      </p:sp>
+      <p:sp>
+        <p:nvSpPr>
+          <p:cNvPr id="11" name="Text 8"/>
+          <p:cNvSpPr/>
+          <p:nvPr/>
+        </p:nvSpPr>
+        <p:spPr>
+          <a:xfrm>
+            <a:off x="658368" y="4224528"/>
+            <a:ext cx="7827264" cy="475488"/>
+          </a:xfrm>
+          <a:prstGeom prst="rect">
+            <a:avLst/>
+          </a:prstGeom>
+          <a:noFill/>
+          <a:ln/>
+        </p:spPr>
+        <p:txBody>
+          <a:bodyPr wrap="square" lIns="0" tIns="0" rIns="0" bIns="0" rtlCol="0" anchor="ctr"/>
+          <a:lstStyle/>
+          <a:p>
+            <a:pPr indent="0" marL="0">
+              <a:buNone/>
+            </a:pPr>
+            <a:r>
+              <a:rPr lang="en-US" sz="1150" b="1" dirty="0">
+                <a:solidFill>
+                  <a:srgbClr val="1F4E79"/>
+                </a:solidFill>
+                <a:latin typeface="Calibri" pitchFamily="34" charset="0"/>
+                <a:ea typeface="Calibri" pitchFamily="34" charset="-122"/>
+                <a:cs typeface="Calibri" pitchFamily="34" charset="-120"/>
+              </a:rPr>
+              <a:t>A rejected assumption became a mechanism, a descriptor, and a convergence check — that is a result.</a:t>
+            </a:r>
+            <a:endParaRPr lang="en-US" sz="1150" dirty="0"/>
+          </a:p>
+        </p:txBody>
+      </p:sp>
+    </p:spTree>
+  </p:cSld>
+  <p:clrMapOvr>
+    <a:masterClrMapping/>
+  </p:clrMapOvr>
+</p:sld>
+</file>
+
+<file path=ppt/slides/slide16.xml><?xml version="1.0" encoding="utf-8"?>
+<p:sld xmlns:a="http://schemas.openxmlformats.org/drawingml/2006/main" xmlns:r="http://schemas.openxmlformats.org/officeDocument/2006/relationships" xmlns:p="http://schemas.openxmlformats.org/presentationml/2006/main">
+  <p:cSld name="Slide 16">
+    <p:spTree>
+      <p:nvGrpSpPr>
+        <p:cNvPr id="1" name=""/>
+        <p:cNvGrpSpPr/>
+        <p:nvPr/>
+      </p:nvGrpSpPr>
+      <p:grpSpPr>
+        <a:xfrm>
+          <a:off x="0" y="0"/>
+          <a:ext cx="0" cy="0"/>
+          <a:chOff x="0" y="0"/>
+          <a:chExt cx="0" cy="0"/>
+        </a:xfrm>
+      </p:grpSpPr>
+      <p:sp>
+        <p:nvSpPr>
+          <p:cNvPr id="2" name="Text 0"/>
+          <p:cNvSpPr/>
+          <p:nvPr/>
+        </p:nvSpPr>
+        <p:spPr>
+          <a:xfrm>
+            <a:off x="384048" y="182880"/>
+            <a:ext cx="7498080" cy="502920"/>
+          </a:xfrm>
+          <a:prstGeom prst="rect">
+            <a:avLst/>
+          </a:prstGeom>
+          <a:noFill/>
+          <a:ln/>
+        </p:spPr>
+        <p:txBody>
+          <a:bodyPr wrap="square" lIns="0" tIns="0" rIns="0" bIns="0" rtlCol="0" anchor="ctr"/>
+          <a:lstStyle/>
+          <a:p>
+            <a:pPr indent="0" marL="0">
+              <a:buNone/>
+            </a:pPr>
+            <a:r>
+              <a:rPr lang="en-US" sz="2400" b="1" dirty="0">
+                <a:solidFill>
+                  <a:srgbClr val="1F4E79"/>
+                </a:solidFill>
+                <a:latin typeface="Arial" pitchFamily="34" charset="0"/>
+                <a:ea typeface="Arial" pitchFamily="34" charset="-122"/>
+                <a:cs typeface="Arial" pitchFamily="34" charset="-120"/>
+              </a:rPr>
               <a:t>Future plan</a:t>
             </a:r>
             <a:endParaRPr lang="en-US" sz="2400" dirty="0"/>
@@ -11595,7 +12302,7 @@
                 <a:ea typeface="Calibri" pitchFamily="34" charset="-122"/>
                 <a:cs typeface="Calibri" pitchFamily="34" charset="-120"/>
               </a:rPr>
-              <a:t>14</a:t>
+              <a:t>15</a:t>
             </a:r>
             <a:endParaRPr lang="en-US" sz="900" dirty="0"/>
           </a:p>
@@ -11707,7 +12414,7 @@
       </p:sp>
       <p:graphicFrame>
         <p:nvGraphicFramePr>
-          <p:cNvPr id="16" name="Table 0"/>
+          <p:cNvPr id="17" name="Table 0"/>
           <p:cNvGraphicFramePr>
             <a:graphicFrameLocks noGrp="1"/>
           </p:cNvGraphicFramePr>
@@ -12162,7 +12869,7 @@
                           <a:ea typeface="Calibri" pitchFamily="34" charset="-122"/>
                           <a:cs typeface="Calibri" pitchFamily="34" charset="-120"/>
                         </a:rPr>
-                        <a:t>σ(φ): composition vs thickness</a:t>
+                        <a:t>σ(φ, d_h) exponent at finer grid</a:t>
                       </a:r>
                       <a:endParaRPr lang="en-US" sz="950" dirty="0">
                         <a:latin typeface="Calibri" charset="0"/>
@@ -12230,7 +12937,7 @@
                           <a:ea typeface="Calibri" pitchFamily="34" charset="-122"/>
                           <a:cs typeface="Calibri" pitchFamily="34" charset="-120"/>
                         </a:rPr>
-                        <a:t>4 comp. × 3 pts</a:t>
+                        <a:t>n_grid 288 (~4 h)</a:t>
                       </a:r>
                       <a:endParaRPr lang="en-US" sz="950" dirty="0">
                         <a:latin typeface="Calibri" charset="0"/>
@@ -12298,7 +13005,7 @@
                           <a:ea typeface="Calibri" pitchFamily="34" charset="-122"/>
                           <a:cs typeface="Calibri" pitchFamily="34" charset="-120"/>
                         </a:rPr>
-                        <a:t>two-variable extension σ(φ, h)</a:t>
+                        <a:t>converged value (now bounded: |slope| ≥ 0.54)</a:t>
                       </a:r>
                       <a:endParaRPr lang="en-US" sz="950" dirty="0">
                         <a:latin typeface="Calibri" charset="0"/>
@@ -13297,9 +14004,9 @@
 </p:sld>
 </file>
 
-<file path=ppt/slides/slide16.xml><?xml version="1.0" encoding="utf-8"?>
+<file path=ppt/slides/slide17.xml><?xml version="1.0" encoding="utf-8"?>
 <p:sld xmlns:a="http://schemas.openxmlformats.org/drawingml/2006/main" xmlns:r="http://schemas.openxmlformats.org/officeDocument/2006/relationships" xmlns:p="http://schemas.openxmlformats.org/presentationml/2006/main">
-  <p:cSld name="Slide 16">
+  <p:cSld name="Slide 17">
     <p:spTree>
       <p:nvGrpSpPr>
         <p:cNvPr id="1" name=""/>
@@ -13420,9 +14127,9 @@
 </p:sld>
 </file>
 
-<file path=ppt/slides/slide17.xml><?xml version="1.0" encoding="utf-8"?>
+<file path=ppt/slides/slide18.xml><?xml version="1.0" encoding="utf-8"?>
 <p:sld xmlns:a="http://schemas.openxmlformats.org/drawingml/2006/main" xmlns:r="http://schemas.openxmlformats.org/officeDocument/2006/relationships" xmlns:p="http://schemas.openxmlformats.org/presentationml/2006/main">
-  <p:cSld name="Slide 17">
+  <p:cSld name="Slide 18">
     <p:spTree>
       <p:nvGrpSpPr>
         <p:cNvPr id="1" name=""/>
@@ -13610,7 +14317,7 @@
                 <a:ea typeface="Calibri" pitchFamily="34" charset="-122"/>
                 <a:cs typeface="Calibri" pitchFamily="34" charset="-120"/>
               </a:rPr>
-              <a:t>15</a:t>
+              <a:t>16</a:t>
             </a:r>
             <a:endParaRPr lang="en-US" sz="900" dirty="0"/>
           </a:p>
@@ -13683,7 +14390,7 @@
       </p:sp>
       <p:graphicFrame>
         <p:nvGraphicFramePr>
-          <p:cNvPr id="18" name="Table 0"/>
+          <p:cNvPr id="19" name="Table 0"/>
           <p:cNvGraphicFramePr>
             <a:graphicFrameLocks noGrp="1"/>
           </p:cNvGraphicFramePr>
@@ -14796,9 +15503,9 @@
 </p:sld>
 </file>
 
-<file path=ppt/slides/slide18.xml><?xml version="1.0" encoding="utf-8"?>
+<file path=ppt/slides/slide19.xml><?xml version="1.0" encoding="utf-8"?>
 <p:sld xmlns:a="http://schemas.openxmlformats.org/drawingml/2006/main" xmlns:r="http://schemas.openxmlformats.org/officeDocument/2006/relationships" xmlns:p="http://schemas.openxmlformats.org/presentationml/2006/main">
-  <p:cSld name="Slide 18">
+  <p:cSld name="Slide 19">
     <p:spTree>
       <p:nvGrpSpPr>
         <p:cNvPr id="1" name=""/>
@@ -14986,7 +15693,7 @@
                 <a:ea typeface="Calibri" pitchFamily="34" charset="-122"/>
                 <a:cs typeface="Calibri" pitchFamily="34" charset="-120"/>
               </a:rPr>
-              <a:t>16</a:t>
+              <a:t>17</a:t>
             </a:r>
             <a:endParaRPr lang="en-US" sz="900" dirty="0"/>
           </a:p>
@@ -14994,7 +15701,7 @@
       </p:sp>
       <p:graphicFrame>
         <p:nvGraphicFramePr>
-          <p:cNvPr id="19" name="Table 0"/>
+          <p:cNvPr id="20" name="Table 0"/>
           <p:cNvGraphicFramePr>
             <a:graphicFrameLocks noGrp="1"/>
           </p:cNvGraphicFramePr>
@@ -17356,9 +18063,9 @@
 </p:sld>
 </file>
 
-<file path=ppt/slides/slide19.xml><?xml version="1.0" encoding="utf-8"?>
+<file path=ppt/slides/slide2.xml><?xml version="1.0" encoding="utf-8"?>
 <p:sld xmlns:a="http://schemas.openxmlformats.org/drawingml/2006/main" xmlns:r="http://schemas.openxmlformats.org/officeDocument/2006/relationships" xmlns:p="http://schemas.openxmlformats.org/presentationml/2006/main">
-  <p:cSld name="Slide 19">
+  <p:cSld name="Slide 2">
     <p:spTree>
       <p:nvGrpSpPr>
         <p:cNvPr id="1" name=""/>
@@ -17406,7 +18113,7 @@
                 <a:ea typeface="Arial" pitchFamily="34" charset="-122"/>
                 <a:cs typeface="Arial" pitchFamily="34" charset="-120"/>
               </a:rPr>
-              <a:t>Appendix C · Anticipated questions</a:t>
+              <a:t>Introduction</a:t>
             </a:r>
             <a:endParaRPr lang="en-US" sz="2400" dirty="0"/>
           </a:p>
@@ -17468,7 +18175,7 @@
                 <a:ea typeface="Calibri" pitchFamily="34" charset="-122"/>
                 <a:cs typeface="Calibri" pitchFamily="34" charset="-120"/>
               </a:rPr>
-              <a:t>full set (40 Q&amp;A): docs/seminar_20260806_script.md</a:t>
+              <a:t>J. Electrochem. Soc. 168 (2021) 040537 · Sci. Rep. 3 (2013) 2261</a:t>
             </a:r>
             <a:endParaRPr lang="en-US" sz="800" dirty="0"/>
           </a:p>
@@ -17546,7 +18253,913 @@
                 <a:ea typeface="Calibri" pitchFamily="34" charset="-122"/>
                 <a:cs typeface="Calibri" pitchFamily="34" charset="-120"/>
               </a:rPr>
-              <a:t>17</a:t>
+              <a:t>1</a:t>
+            </a:r>
+            <a:endParaRPr lang="en-US" sz="900" dirty="0"/>
+          </a:p>
+        </p:txBody>
+      </p:sp>
+      <p:sp>
+        <p:nvSpPr>
+          <p:cNvPr id="7" name="Text 5"/>
+          <p:cNvSpPr/>
+          <p:nvPr/>
+        </p:nvSpPr>
+        <p:spPr>
+          <a:xfrm>
+            <a:off x="502920" y="914400"/>
+            <a:ext cx="8138160" cy="1143000"/>
+          </a:xfrm>
+          <a:prstGeom prst="rect">
+            <a:avLst/>
+          </a:prstGeom>
+          <a:noFill/>
+          <a:ln/>
+        </p:spPr>
+        <p:txBody>
+          <a:bodyPr wrap="square" lIns="0" tIns="0" rIns="0" bIns="0" rtlCol="0" anchor="t"/>
+          <a:lstStyle/>
+          <a:p>
+            <a:pPr indent="0" marL="0">
+              <a:lnSpc>
+                <a:spcPts val="1800"/>
+              </a:lnSpc>
+              <a:spcAft>
+                <a:spcPts val="500"/>
+              </a:spcAft>
+              <a:buNone/>
+            </a:pPr>
+            <a:r>
+              <a:rPr lang="en-US" sz="1400" b="1" dirty="0">
+                <a:solidFill>
+                  <a:srgbClr val="C00000"/>
+                </a:solidFill>
+                <a:latin typeface="Calibri" pitchFamily="34" charset="0"/>
+                <a:ea typeface="Calibri" pitchFamily="34" charset="-122"/>
+                <a:cs typeface="Calibri" pitchFamily="34" charset="-120"/>
+              </a:rPr>
+              <a:t>■  </a:t>
+            </a:r>
+            <a:pPr indent="0" marL="0">
+              <a:lnSpc>
+                <a:spcPts val="1800"/>
+              </a:lnSpc>
+              <a:spcAft>
+                <a:spcPts val="500"/>
+              </a:spcAft>
+              <a:buNone/>
+            </a:pPr>
+            <a:r>
+              <a:rPr lang="en-US" sz="1400" b="1" dirty="0">
+                <a:solidFill>
+                  <a:srgbClr val="262626"/>
+                </a:solidFill>
+                <a:latin typeface="Calibri" pitchFamily="34" charset="0"/>
+                <a:ea typeface="Calibri" pitchFamily="34" charset="-122"/>
+                <a:cs typeface="Calibri" pitchFamily="34" charset="-120"/>
+              </a:rPr>
+              <a:t>In an all-solid-state cathode, performance is decided by microstructure</a:t>
+            </a:r>
+            <a:endParaRPr lang="en-US" sz="1400" dirty="0"/>
+          </a:p>
+          <a:p>
+            <a:pPr indent="0" marL="0">
+              <a:lnSpc>
+                <a:spcPts val="1800"/>
+              </a:lnSpc>
+              <a:spcAft>
+                <a:spcPts val="500"/>
+              </a:spcAft>
+              <a:buNone/>
+            </a:pPr>
+            <a:r>
+              <a:rPr lang="en-US" sz="1300" dirty="0">
+                <a:solidFill>
+                  <a:srgbClr val="808080"/>
+                </a:solidFill>
+                <a:latin typeface="Calibri" pitchFamily="34" charset="0"/>
+                <a:ea typeface="Calibri" pitchFamily="34" charset="-122"/>
+                <a:cs typeface="Calibri" pitchFamily="34" charset="-120"/>
+              </a:rPr>
+              <a:t>     ·   </a:t>
+            </a:r>
+            <a:pPr indent="0" marL="0">
+              <a:lnSpc>
+                <a:spcPts val="1800"/>
+              </a:lnSpc>
+              <a:spcAft>
+                <a:spcPts val="500"/>
+              </a:spcAft>
+              <a:buNone/>
+            </a:pPr>
+            <a:r>
+              <a:rPr lang="en-US" sz="1300" dirty="0">
+                <a:solidFill>
+                  <a:srgbClr val="262626"/>
+                </a:solidFill>
+                <a:latin typeface="Calibri" pitchFamily="34" charset="0"/>
+                <a:ea typeface="Calibri" pitchFamily="34" charset="-122"/>
+                <a:cs typeface="Calibri" pitchFamily="34" charset="-120"/>
+              </a:rPr>
+              <a:t>In a liquid cell the electrolyte </a:t>
+            </a:r>
+            <a:pPr indent="0" marL="0">
+              <a:lnSpc>
+                <a:spcPts val="1800"/>
+              </a:lnSpc>
+              <a:spcAft>
+                <a:spcPts val="500"/>
+              </a:spcAft>
+              <a:buNone/>
+            </a:pPr>
+            <a:r>
+              <a:rPr lang="en-US" sz="1300" b="1" dirty="0">
+                <a:solidFill>
+                  <a:srgbClr val="2E74B5"/>
+                </a:solidFill>
+                <a:latin typeface="Calibri" pitchFamily="34" charset="0"/>
+                <a:ea typeface="Calibri" pitchFamily="34" charset="-122"/>
+                <a:cs typeface="Calibri" pitchFamily="34" charset="-120"/>
+              </a:rPr>
+              <a:t>soaks every particle</a:t>
+            </a:r>
+            <a:pPr indent="0" marL="0">
+              <a:lnSpc>
+                <a:spcPts val="1800"/>
+              </a:lnSpc>
+              <a:spcAft>
+                <a:spcPts val="500"/>
+              </a:spcAft>
+              <a:buNone/>
+            </a:pPr>
+            <a:r>
+              <a:rPr lang="en-US" sz="1300" dirty="0">
+                <a:solidFill>
+                  <a:srgbClr val="262626"/>
+                </a:solidFill>
+                <a:latin typeface="Calibri" pitchFamily="34" charset="0"/>
+                <a:ea typeface="Calibri" pitchFamily="34" charset="-122"/>
+                <a:cs typeface="Calibri" pitchFamily="34" charset="-120"/>
+              </a:rPr>
+              <a:t>. In a solid cell, Li</a:t>
+            </a:r>
+            <a:pPr indent="0" marL="0">
+              <a:lnSpc>
+                <a:spcPts val="1800"/>
+              </a:lnSpc>
+              <a:spcAft>
+                <a:spcPts val="500"/>
+              </a:spcAft>
+              <a:buNone/>
+            </a:pPr>
+            <a:r>
+              <a:rPr lang="en-US" sz="1300" dirty="0">
+                <a:solidFill>
+                  <a:srgbClr val="262626"/>
+                </a:solidFill>
+                <a:latin typeface="Calibri" pitchFamily="34" charset="0"/>
+                <a:ea typeface="Calibri" pitchFamily="34" charset="-122"/>
+                <a:cs typeface="Calibri" pitchFamily="34" charset="-120"/>
+              </a:rPr>
+              <a:t>+</a:t>
+            </a:r>
+            <a:pPr indent="0" marL="0">
+              <a:lnSpc>
+                <a:spcPts val="1800"/>
+              </a:lnSpc>
+              <a:spcAft>
+                <a:spcPts val="500"/>
+              </a:spcAft>
+              <a:buNone/>
+            </a:pPr>
+            <a:r>
+              <a:rPr lang="en-US" sz="1300" dirty="0">
+                <a:solidFill>
+                  <a:srgbClr val="262626"/>
+                </a:solidFill>
+                <a:latin typeface="Calibri" pitchFamily="34" charset="0"/>
+                <a:ea typeface="Calibri" pitchFamily="34" charset="-122"/>
+                <a:cs typeface="Calibri" pitchFamily="34" charset="-120"/>
+              </a:rPr>
+              <a:t> passes only where powders were </a:t>
+            </a:r>
+            <a:pPr indent="0" marL="0">
+              <a:lnSpc>
+                <a:spcPts val="1800"/>
+              </a:lnSpc>
+              <a:spcAft>
+                <a:spcPts val="500"/>
+              </a:spcAft>
+              <a:buNone/>
+            </a:pPr>
+            <a:r>
+              <a:rPr lang="en-US" sz="1300" b="1" dirty="0">
+                <a:solidFill>
+                  <a:srgbClr val="C00000"/>
+                </a:solidFill>
+                <a:latin typeface="Calibri" pitchFamily="34" charset="0"/>
+                <a:ea typeface="Calibri" pitchFamily="34" charset="-122"/>
+                <a:cs typeface="Calibri" pitchFamily="34" charset="-120"/>
+              </a:rPr>
+              <a:t>pressed into contact</a:t>
+            </a:r>
+            <a:pPr indent="0" marL="0">
+              <a:lnSpc>
+                <a:spcPts val="1800"/>
+              </a:lnSpc>
+              <a:spcAft>
+                <a:spcPts val="500"/>
+              </a:spcAft>
+              <a:buNone/>
+            </a:pPr>
+            <a:r>
+              <a:rPr lang="en-US" sz="1300" dirty="0">
+                <a:solidFill>
+                  <a:srgbClr val="262626"/>
+                </a:solidFill>
+                <a:latin typeface="Calibri" pitchFamily="34" charset="0"/>
+                <a:ea typeface="Calibri" pitchFamily="34" charset="-122"/>
+                <a:cs typeface="Calibri" pitchFamily="34" charset="-120"/>
+              </a:rPr>
+              <a:t>.</a:t>
+            </a:r>
+            <a:endParaRPr lang="en-US" sz="1400" dirty="0"/>
+          </a:p>
+          <a:p>
+            <a:pPr indent="0" marL="0">
+              <a:lnSpc>
+                <a:spcPts val="1800"/>
+              </a:lnSpc>
+              <a:spcAft>
+                <a:spcPts val="500"/>
+              </a:spcAft>
+              <a:buNone/>
+            </a:pPr>
+            <a:r>
+              <a:rPr lang="en-US" sz="1300" dirty="0">
+                <a:solidFill>
+                  <a:srgbClr val="808080"/>
+                </a:solidFill>
+                <a:latin typeface="Calibri" pitchFamily="34" charset="0"/>
+                <a:ea typeface="Calibri" pitchFamily="34" charset="-122"/>
+                <a:cs typeface="Calibri" pitchFamily="34" charset="-120"/>
+              </a:rPr>
+              <a:t>     ·   </a:t>
+            </a:r>
+            <a:pPr indent="0" marL="0">
+              <a:lnSpc>
+                <a:spcPts val="1800"/>
+              </a:lnSpc>
+              <a:spcAft>
+                <a:spcPts val="500"/>
+              </a:spcAft>
+              <a:buNone/>
+            </a:pPr>
+            <a:r>
+              <a:rPr lang="en-US" sz="1300" dirty="0">
+                <a:solidFill>
+                  <a:srgbClr val="262626"/>
+                </a:solidFill>
+                <a:latin typeface="Calibri" pitchFamily="34" charset="0"/>
+                <a:ea typeface="Calibri" pitchFamily="34" charset="-122"/>
+                <a:cs typeface="Calibri" pitchFamily="34" charset="-120"/>
+              </a:rPr>
+              <a:t>Cathode = active material (AM, NCM811) + solid electrolyte (SE, Li</a:t>
+            </a:r>
+            <a:pPr indent="0" marL="0">
+              <a:lnSpc>
+                <a:spcPts val="1800"/>
+              </a:lnSpc>
+              <a:spcAft>
+                <a:spcPts val="500"/>
+              </a:spcAft>
+              <a:buNone/>
+            </a:pPr>
+            <a:r>
+              <a:rPr lang="en-US" sz="1300" dirty="0">
+                <a:solidFill>
+                  <a:srgbClr val="262626"/>
+                </a:solidFill>
+                <a:latin typeface="Calibri" pitchFamily="34" charset="0"/>
+                <a:ea typeface="Calibri" pitchFamily="34" charset="-122"/>
+                <a:cs typeface="Calibri" pitchFamily="34" charset="-120"/>
+              </a:rPr>
+              <a:t>6</a:t>
+            </a:r>
+            <a:pPr indent="0" marL="0">
+              <a:lnSpc>
+                <a:spcPts val="1800"/>
+              </a:lnSpc>
+              <a:spcAft>
+                <a:spcPts val="500"/>
+              </a:spcAft>
+              <a:buNone/>
+            </a:pPr>
+            <a:r>
+              <a:rPr lang="en-US" sz="1300" dirty="0">
+                <a:solidFill>
+                  <a:srgbClr val="262626"/>
+                </a:solidFill>
+                <a:latin typeface="Calibri" pitchFamily="34" charset="0"/>
+                <a:ea typeface="Calibri" pitchFamily="34" charset="-122"/>
+                <a:cs typeface="Calibri" pitchFamily="34" charset="-120"/>
+              </a:rPr>
+              <a:t>PS</a:t>
+            </a:r>
+            <a:pPr indent="0" marL="0">
+              <a:lnSpc>
+                <a:spcPts val="1800"/>
+              </a:lnSpc>
+              <a:spcAft>
+                <a:spcPts val="500"/>
+              </a:spcAft>
+              <a:buNone/>
+            </a:pPr>
+            <a:r>
+              <a:rPr lang="en-US" sz="1300" dirty="0">
+                <a:solidFill>
+                  <a:srgbClr val="262626"/>
+                </a:solidFill>
+                <a:latin typeface="Calibri" pitchFamily="34" charset="0"/>
+                <a:ea typeface="Calibri" pitchFamily="34" charset="-122"/>
+                <a:cs typeface="Calibri" pitchFamily="34" charset="-120"/>
+              </a:rPr>
+              <a:t>5</a:t>
+            </a:r>
+            <a:pPr indent="0" marL="0">
+              <a:lnSpc>
+                <a:spcPts val="1800"/>
+              </a:lnSpc>
+              <a:spcAft>
+                <a:spcPts val="500"/>
+              </a:spcAft>
+              <a:buNone/>
+            </a:pPr>
+            <a:r>
+              <a:rPr lang="en-US" sz="1300" dirty="0">
+                <a:solidFill>
+                  <a:srgbClr val="262626"/>
+                </a:solidFill>
+                <a:latin typeface="Calibri" pitchFamily="34" charset="0"/>
+                <a:ea typeface="Calibri" pitchFamily="34" charset="-122"/>
+                <a:cs typeface="Calibri" pitchFamily="34" charset="-120"/>
+              </a:rPr>
+              <a:t>Cl) powders, cold-pressed at </a:t>
+            </a:r>
+            <a:pPr indent="0" marL="0">
+              <a:lnSpc>
+                <a:spcPts val="1800"/>
+              </a:lnSpc>
+              <a:spcAft>
+                <a:spcPts val="500"/>
+              </a:spcAft>
+              <a:buNone/>
+            </a:pPr>
+            <a:r>
+              <a:rPr lang="en-US" sz="1300" b="1" dirty="0">
+                <a:solidFill>
+                  <a:srgbClr val="262626"/>
+                </a:solidFill>
+                <a:latin typeface="Calibri" pitchFamily="34" charset="0"/>
+                <a:ea typeface="Calibri" pitchFamily="34" charset="-122"/>
+                <a:cs typeface="Calibri" pitchFamily="34" charset="-120"/>
+              </a:rPr>
+              <a:t>300 MPa</a:t>
+            </a:r>
+            <a:pPr indent="0" marL="0">
+              <a:lnSpc>
+                <a:spcPts val="1800"/>
+              </a:lnSpc>
+              <a:spcAft>
+                <a:spcPts val="500"/>
+              </a:spcAft>
+              <a:buNone/>
+            </a:pPr>
+            <a:r>
+              <a:rPr lang="en-US" sz="1300" dirty="0">
+                <a:solidFill>
+                  <a:srgbClr val="262626"/>
+                </a:solidFill>
+                <a:latin typeface="Calibri" pitchFamily="34" charset="0"/>
+                <a:ea typeface="Calibri" pitchFamily="34" charset="-122"/>
+                <a:cs typeface="Calibri" pitchFamily="34" charset="-120"/>
+              </a:rPr>
+              <a:t>.</a:t>
+            </a:r>
+            <a:endParaRPr lang="en-US" sz="1400" dirty="0"/>
+          </a:p>
+          <a:p>
+            <a:pPr indent="0" marL="0">
+              <a:lnSpc>
+                <a:spcPts val="1800"/>
+              </a:lnSpc>
+              <a:spcAft>
+                <a:spcPts val="500"/>
+              </a:spcAft>
+              <a:buNone/>
+            </a:pPr>
+            <a:r>
+              <a:rPr lang="en-US" sz="1300" dirty="0">
+                <a:solidFill>
+                  <a:srgbClr val="808080"/>
+                </a:solidFill>
+                <a:latin typeface="Calibri" pitchFamily="34" charset="0"/>
+                <a:ea typeface="Calibri" pitchFamily="34" charset="-122"/>
+                <a:cs typeface="Calibri" pitchFamily="34" charset="-120"/>
+              </a:rPr>
+              <a:t>     ·   </a:t>
+            </a:r>
+            <a:pPr indent="0" marL="0">
+              <a:lnSpc>
+                <a:spcPts val="1800"/>
+              </a:lnSpc>
+              <a:spcAft>
+                <a:spcPts val="500"/>
+              </a:spcAft>
+              <a:buNone/>
+            </a:pPr>
+            <a:r>
+              <a:rPr lang="en-US" sz="1300" dirty="0">
+                <a:solidFill>
+                  <a:srgbClr val="262626"/>
+                </a:solidFill>
+                <a:latin typeface="Calibri" pitchFamily="34" charset="0"/>
+                <a:ea typeface="Calibri" pitchFamily="34" charset="-122"/>
+                <a:cs typeface="Calibri" pitchFamily="34" charset="-120"/>
+              </a:rPr>
+              <a:t>⇒ What decides performance is </a:t>
+            </a:r>
+            <a:pPr indent="0" marL="0">
+              <a:lnSpc>
+                <a:spcPts val="1800"/>
+              </a:lnSpc>
+              <a:spcAft>
+                <a:spcPts val="500"/>
+              </a:spcAft>
+              <a:buNone/>
+            </a:pPr>
+            <a:r>
+              <a:rPr lang="en-US" sz="1300" b="1" dirty="0">
+                <a:solidFill>
+                  <a:srgbClr val="2E74B5"/>
+                </a:solidFill>
+                <a:latin typeface="Calibri" pitchFamily="34" charset="0"/>
+                <a:ea typeface="Calibri" pitchFamily="34" charset="-122"/>
+                <a:cs typeface="Calibri" pitchFamily="34" charset="-120"/>
+              </a:rPr>
+              <a:t>not the chemical formula but the microstructure</a:t>
+            </a:r>
+            <a:pPr indent="0" marL="0">
+              <a:lnSpc>
+                <a:spcPts val="1800"/>
+              </a:lnSpc>
+              <a:spcAft>
+                <a:spcPts val="500"/>
+              </a:spcAft>
+              <a:buNone/>
+            </a:pPr>
+            <a:r>
+              <a:rPr lang="en-US" sz="1300" dirty="0">
+                <a:solidFill>
+                  <a:srgbClr val="262626"/>
+                </a:solidFill>
+                <a:latin typeface="Calibri" pitchFamily="34" charset="0"/>
+                <a:ea typeface="Calibri" pitchFamily="34" charset="-122"/>
+                <a:cs typeface="Calibri" pitchFamily="34" charset="-120"/>
+              </a:rPr>
+              <a:t> — porosity, where particles touch, and how ions/electrons flow through those contacts.</a:t>
+            </a:r>
+            <a:endParaRPr lang="en-US" sz="1400" dirty="0"/>
+          </a:p>
+        </p:txBody>
+      </p:sp>
+      <p:sp>
+        <p:nvSpPr>
+          <p:cNvPr id="8" name="Shape 6"/>
+          <p:cNvSpPr/>
+          <p:nvPr/>
+        </p:nvSpPr>
+        <p:spPr>
+          <a:xfrm>
+            <a:off x="548640" y="2194560"/>
+            <a:ext cx="3886200" cy="1874520"/>
+          </a:xfrm>
+          <a:prstGeom prst="rect">
+            <a:avLst/>
+          </a:prstGeom>
+          <a:solidFill>
+            <a:srgbClr val="FAFAFA"/>
+          </a:solidFill>
+          <a:ln w="9525">
+            <a:solidFill>
+              <a:srgbClr val="BFBFBF"/>
+            </a:solidFill>
+            <a:prstDash val="dash"/>
+          </a:ln>
+        </p:spPr>
+      </p:sp>
+      <p:sp>
+        <p:nvSpPr>
+          <p:cNvPr id="9" name="Text 7"/>
+          <p:cNvSpPr/>
+          <p:nvPr/>
+        </p:nvSpPr>
+        <p:spPr>
+          <a:xfrm>
+            <a:off x="621792" y="2194560"/>
+            <a:ext cx="3739896" cy="1874520"/>
+          </a:xfrm>
+          <a:prstGeom prst="rect">
+            <a:avLst/>
+          </a:prstGeom>
+          <a:noFill/>
+          <a:ln/>
+        </p:spPr>
+        <p:txBody>
+          <a:bodyPr wrap="square" lIns="0" tIns="0" rIns="0" bIns="0" rtlCol="0" anchor="ctr"/>
+          <a:lstStyle/>
+          <a:p>
+            <a:pPr algn="ctr" indent="0" marL="0">
+              <a:buNone/>
+            </a:pPr>
+            <a:r>
+              <a:rPr lang="en-US" sz="950" dirty="0">
+                <a:solidFill>
+                  <a:srgbClr val="808080"/>
+                </a:solidFill>
+                <a:latin typeface="Calibri" pitchFamily="34" charset="0"/>
+                <a:ea typeface="Calibri" pitchFamily="34" charset="-122"/>
+                <a:cs typeface="Calibri" pitchFamily="34" charset="-120"/>
+              </a:rPr>
+              <a:t>[Fig] liquid cell (fully wetted) vs solid cell (contact points only)</a:t>
+            </a:r>
+            <a:endParaRPr lang="en-US" sz="950" dirty="0"/>
+          </a:p>
+          <a:p>
+            <a:pPr algn="ctr" indent="0" marL="0">
+              <a:buNone/>
+            </a:pPr>
+            <a:r>
+              <a:rPr lang="en-US" sz="950" dirty="0">
+                <a:solidFill>
+                  <a:srgbClr val="808080"/>
+                </a:solidFill>
+                <a:latin typeface="Calibri" pitchFamily="34" charset="0"/>
+                <a:ea typeface="Calibri" pitchFamily="34" charset="-122"/>
+                <a:cs typeface="Calibri" pitchFamily="34" charset="-120"/>
+              </a:rPr>
+              <a:t>★ 이 덱에서 가장 중요한 그림 — 새로 그려야 함</a:t>
+            </a:r>
+            <a:endParaRPr lang="en-US" sz="950" dirty="0"/>
+          </a:p>
+        </p:txBody>
+      </p:sp>
+      <p:sp>
+        <p:nvSpPr>
+          <p:cNvPr id="10" name="Shape 8"/>
+          <p:cNvSpPr/>
+          <p:nvPr/>
+        </p:nvSpPr>
+        <p:spPr>
+          <a:xfrm>
+            <a:off x="4709160" y="2194560"/>
+            <a:ext cx="3886200" cy="1874520"/>
+          </a:xfrm>
+          <a:prstGeom prst="rect">
+            <a:avLst/>
+          </a:prstGeom>
+          <a:solidFill>
+            <a:srgbClr val="FAFAFA"/>
+          </a:solidFill>
+          <a:ln w="9525">
+            <a:solidFill>
+              <a:srgbClr val="BFBFBF"/>
+            </a:solidFill>
+            <a:prstDash val="dash"/>
+          </a:ln>
+        </p:spPr>
+      </p:sp>
+      <p:sp>
+        <p:nvSpPr>
+          <p:cNvPr id="11" name="Text 9"/>
+          <p:cNvSpPr/>
+          <p:nvPr/>
+        </p:nvSpPr>
+        <p:spPr>
+          <a:xfrm>
+            <a:off x="4782312" y="2194560"/>
+            <a:ext cx="3739896" cy="1874520"/>
+          </a:xfrm>
+          <a:prstGeom prst="rect">
+            <a:avLst/>
+          </a:prstGeom>
+          <a:noFill/>
+          <a:ln/>
+        </p:spPr>
+        <p:txBody>
+          <a:bodyPr wrap="square" lIns="0" tIns="0" rIns="0" bIns="0" rtlCol="0" anchor="ctr"/>
+          <a:lstStyle/>
+          <a:p>
+            <a:pPr algn="ctr" indent="0" marL="0">
+              <a:buNone/>
+            </a:pPr>
+            <a:r>
+              <a:rPr lang="en-US" sz="950" dirty="0">
+                <a:solidFill>
+                  <a:srgbClr val="808080"/>
+                </a:solidFill>
+                <a:latin typeface="Calibri" pitchFamily="34" charset="0"/>
+                <a:ea typeface="Calibri" pitchFamily="34" charset="-122"/>
+                <a:cs typeface="Calibri" pitchFamily="34" charset="-120"/>
+              </a:rPr>
+              <a:t>[Fig] cold-pressed composite cathode</a:t>
+            </a:r>
+            <a:endParaRPr lang="en-US" sz="950" dirty="0"/>
+          </a:p>
+          <a:p>
+            <a:pPr algn="ctr" indent="0" marL="0">
+              <a:buNone/>
+            </a:pPr>
+            <a:r>
+              <a:rPr lang="en-US" sz="950" dirty="0">
+                <a:solidFill>
+                  <a:srgbClr val="808080"/>
+                </a:solidFill>
+                <a:latin typeface="Calibri" pitchFamily="34" charset="0"/>
+                <a:ea typeface="Calibri" pitchFamily="34" charset="-122"/>
+                <a:cs typeface="Calibri" pitchFamily="34" charset="-120"/>
+              </a:rPr>
+              <a:t>cross-section (SEM)</a:t>
+            </a:r>
+            <a:endParaRPr lang="en-US" sz="950" dirty="0"/>
+          </a:p>
+        </p:txBody>
+      </p:sp>
+      <p:sp>
+        <p:nvSpPr>
+          <p:cNvPr id="12" name="Shape 10"/>
+          <p:cNvSpPr/>
+          <p:nvPr/>
+        </p:nvSpPr>
+        <p:spPr>
+          <a:xfrm>
+            <a:off x="502920" y="4224528"/>
+            <a:ext cx="8138160" cy="475488"/>
+          </a:xfrm>
+          <a:prstGeom prst="roundRect">
+            <a:avLst>
+              <a:gd name="adj" fmla="val 11538"/>
+            </a:avLst>
+          </a:prstGeom>
+          <a:solidFill>
+            <a:srgbClr val="EAF1F8"/>
+          </a:solidFill>
+          <a:ln w="9525">
+            <a:solidFill>
+              <a:srgbClr val="2E74B5"/>
+            </a:solidFill>
+            <a:prstDash val="solid"/>
+          </a:ln>
+        </p:spPr>
+      </p:sp>
+      <p:sp>
+        <p:nvSpPr>
+          <p:cNvPr id="13" name="Text 11"/>
+          <p:cNvSpPr/>
+          <p:nvPr/>
+        </p:nvSpPr>
+        <p:spPr>
+          <a:xfrm>
+            <a:off x="658368" y="4224528"/>
+            <a:ext cx="7827264" cy="475488"/>
+          </a:xfrm>
+          <a:prstGeom prst="rect">
+            <a:avLst/>
+          </a:prstGeom>
+          <a:noFill/>
+          <a:ln/>
+        </p:spPr>
+        <p:txBody>
+          <a:bodyPr wrap="square" lIns="0" tIns="0" rIns="0" bIns="0" rtlCol="0" anchor="ctr"/>
+          <a:lstStyle/>
+          <a:p>
+            <a:pPr indent="0" marL="0">
+              <a:buNone/>
+            </a:pPr>
+            <a:r>
+              <a:rPr lang="en-US" sz="1150" b="1" dirty="0">
+                <a:solidFill>
+                  <a:srgbClr val="1F4E79"/>
+                </a:solidFill>
+                <a:latin typeface="Calibri" pitchFamily="34" charset="0"/>
+                <a:ea typeface="Calibri" pitchFamily="34" charset="-122"/>
+                <a:cs typeface="Calibri" pitchFamily="34" charset="-120"/>
+              </a:rPr>
+              <a:t>Same composition, different pressing → different performance.  To see "how", we must look inside.</a:t>
+            </a:r>
+            <a:endParaRPr lang="en-US" sz="1150" dirty="0"/>
+          </a:p>
+        </p:txBody>
+      </p:sp>
+    </p:spTree>
+  </p:cSld>
+  <p:clrMapOvr>
+    <a:masterClrMapping/>
+  </p:clrMapOvr>
+</p:sld>
+</file>
+
+<file path=ppt/slides/slide20.xml><?xml version="1.0" encoding="utf-8"?>
+<p:sld xmlns:a="http://schemas.openxmlformats.org/drawingml/2006/main" xmlns:r="http://schemas.openxmlformats.org/officeDocument/2006/relationships" xmlns:p="http://schemas.openxmlformats.org/presentationml/2006/main">
+  <p:cSld name="Slide 20">
+    <p:spTree>
+      <p:nvGrpSpPr>
+        <p:cNvPr id="1" name=""/>
+        <p:cNvGrpSpPr/>
+        <p:nvPr/>
+      </p:nvGrpSpPr>
+      <p:grpSpPr>
+        <a:xfrm>
+          <a:off x="0" y="0"/>
+          <a:ext cx="0" cy="0"/>
+          <a:chOff x="0" y="0"/>
+          <a:chExt cx="0" cy="0"/>
+        </a:xfrm>
+      </p:grpSpPr>
+      <p:sp>
+        <p:nvSpPr>
+          <p:cNvPr id="2" name="Text 0"/>
+          <p:cNvSpPr/>
+          <p:nvPr/>
+        </p:nvSpPr>
+        <p:spPr>
+          <a:xfrm>
+            <a:off x="384048" y="182880"/>
+            <a:ext cx="7498080" cy="502920"/>
+          </a:xfrm>
+          <a:prstGeom prst="rect">
+            <a:avLst/>
+          </a:prstGeom>
+          <a:noFill/>
+          <a:ln/>
+        </p:spPr>
+        <p:txBody>
+          <a:bodyPr wrap="square" lIns="0" tIns="0" rIns="0" bIns="0" rtlCol="0" anchor="ctr"/>
+          <a:lstStyle/>
+          <a:p>
+            <a:pPr indent="0" marL="0">
+              <a:buNone/>
+            </a:pPr>
+            <a:r>
+              <a:rPr lang="en-US" sz="2400" b="1" dirty="0">
+                <a:solidFill>
+                  <a:srgbClr val="1F4E79"/>
+                </a:solidFill>
+                <a:latin typeface="Arial" pitchFamily="34" charset="0"/>
+                <a:ea typeface="Arial" pitchFamily="34" charset="-122"/>
+                <a:cs typeface="Arial" pitchFamily="34" charset="-120"/>
+              </a:rPr>
+              <a:t>Appendix C · Anticipated questions</a:t>
+            </a:r>
+            <a:endParaRPr lang="en-US" sz="2400" dirty="0"/>
+          </a:p>
+        </p:txBody>
+      </p:sp>
+      <p:sp>
+        <p:nvSpPr>
+          <p:cNvPr id="3" name="Shape 1"/>
+          <p:cNvSpPr/>
+          <p:nvPr/>
+        </p:nvSpPr>
+        <p:spPr>
+          <a:xfrm>
+            <a:off x="384048" y="731520"/>
+            <a:ext cx="8375904" cy="0"/>
+          </a:xfrm>
+          <a:prstGeom prst="line">
+            <a:avLst/>
+          </a:prstGeom>
+          <a:noFill/>
+          <a:ln w="12700">
+            <a:solidFill>
+              <a:srgbClr val="404040"/>
+            </a:solidFill>
+            <a:prstDash val="solid"/>
+          </a:ln>
+        </p:spPr>
+      </p:sp>
+      <p:sp>
+        <p:nvSpPr>
+          <p:cNvPr id="4" name="Text 2"/>
+          <p:cNvSpPr/>
+          <p:nvPr/>
+        </p:nvSpPr>
+        <p:spPr>
+          <a:xfrm>
+            <a:off x="4572000" y="768096"/>
+            <a:ext cx="4187952" cy="201168"/>
+          </a:xfrm>
+          <a:prstGeom prst="rect">
+            <a:avLst/>
+          </a:prstGeom>
+          <a:noFill/>
+          <a:ln/>
+        </p:spPr>
+        <p:txBody>
+          <a:bodyPr wrap="square" lIns="0" tIns="0" rIns="0" bIns="0" rtlCol="0" anchor="ctr"/>
+          <a:lstStyle/>
+          <a:p>
+            <a:pPr algn="r" indent="0" marL="0">
+              <a:buNone/>
+            </a:pPr>
+            <a:r>
+              <a:rPr lang="en-US" sz="800" i="1" dirty="0">
+                <a:solidFill>
+                  <a:srgbClr val="808080"/>
+                </a:solidFill>
+                <a:latin typeface="Calibri" pitchFamily="34" charset="0"/>
+                <a:ea typeface="Calibri" pitchFamily="34" charset="-122"/>
+                <a:cs typeface="Calibri" pitchFamily="34" charset="-120"/>
+              </a:rPr>
+              <a:t>full set (40 Q&amp;A): docs/seminar_20260806_script.md</a:t>
+            </a:r>
+            <a:endParaRPr lang="en-US" sz="800" dirty="0"/>
+          </a:p>
+        </p:txBody>
+      </p:sp>
+      <p:sp>
+        <p:nvSpPr>
+          <p:cNvPr id="5" name="Text 3"/>
+          <p:cNvSpPr/>
+          <p:nvPr/>
+        </p:nvSpPr>
+        <p:spPr>
+          <a:xfrm>
+            <a:off x="384048" y="4800600"/>
+            <a:ext cx="2743200" cy="228600"/>
+          </a:xfrm>
+          <a:prstGeom prst="rect">
+            <a:avLst/>
+          </a:prstGeom>
+          <a:noFill/>
+          <a:ln/>
+        </p:spPr>
+        <p:txBody>
+          <a:bodyPr wrap="square" lIns="0" tIns="0" rIns="0" bIns="0" rtlCol="0" anchor="ctr"/>
+          <a:lstStyle/>
+          <a:p>
+            <a:pPr indent="0" marL="0">
+              <a:buNone/>
+            </a:pPr>
+            <a:r>
+              <a:rPr lang="en-US" sz="900" dirty="0">
+                <a:solidFill>
+                  <a:srgbClr val="A6A6A6"/>
+                </a:solidFill>
+                <a:latin typeface="Calibri" pitchFamily="34" charset="0"/>
+                <a:ea typeface="Calibri" pitchFamily="34" charset="-122"/>
+                <a:cs typeface="Calibri" pitchFamily="34" charset="-120"/>
+              </a:rPr>
+              <a:t>Battery Materials Lab.</a:t>
+            </a:r>
+            <a:endParaRPr lang="en-US" sz="900" dirty="0"/>
+          </a:p>
+        </p:txBody>
+      </p:sp>
+      <p:sp>
+        <p:nvSpPr>
+          <p:cNvPr id="6" name="Text 4"/>
+          <p:cNvSpPr/>
+          <p:nvPr/>
+        </p:nvSpPr>
+        <p:spPr>
+          <a:xfrm>
+            <a:off x="8229600" y="4800600"/>
+            <a:ext cx="530352" cy="228600"/>
+          </a:xfrm>
+          <a:prstGeom prst="rect">
+            <a:avLst/>
+          </a:prstGeom>
+          <a:noFill/>
+          <a:ln/>
+        </p:spPr>
+        <p:txBody>
+          <a:bodyPr wrap="square" lIns="0" tIns="0" rIns="0" bIns="0" rtlCol="0" anchor="ctr"/>
+          <a:lstStyle/>
+          <a:p>
+            <a:pPr algn="r" indent="0" marL="0">
+              <a:buNone/>
+            </a:pPr>
+            <a:r>
+              <a:rPr lang="en-US" sz="900" dirty="0">
+                <a:solidFill>
+                  <a:srgbClr val="A6A6A6"/>
+                </a:solidFill>
+                <a:latin typeface="Calibri" pitchFamily="34" charset="0"/>
+                <a:ea typeface="Calibri" pitchFamily="34" charset="-122"/>
+                <a:cs typeface="Calibri" pitchFamily="34" charset="-120"/>
+              </a:rPr>
+              <a:t>18</a:t>
             </a:r>
             <a:endParaRPr lang="en-US" sz="900" dirty="0"/>
           </a:p>
@@ -17554,7 +19167,7 @@
       </p:sp>
       <p:graphicFrame>
         <p:nvGraphicFramePr>
-          <p:cNvPr id="20" name="Table 0"/>
+          <p:cNvPr id="21" name="Table 0"/>
           <p:cNvGraphicFramePr>
             <a:graphicFrameLocks noGrp="1"/>
           </p:cNvGraphicFramePr>
@@ -18824,912 +20437,6 @@
           </a:graphicData>
         </a:graphic>
       </p:graphicFrame>
-    </p:spTree>
-  </p:cSld>
-  <p:clrMapOvr>
-    <a:masterClrMapping/>
-  </p:clrMapOvr>
-</p:sld>
-</file>
-
-<file path=ppt/slides/slide2.xml><?xml version="1.0" encoding="utf-8"?>
-<p:sld xmlns:a="http://schemas.openxmlformats.org/drawingml/2006/main" xmlns:r="http://schemas.openxmlformats.org/officeDocument/2006/relationships" xmlns:p="http://schemas.openxmlformats.org/presentationml/2006/main">
-  <p:cSld name="Slide 2">
-    <p:spTree>
-      <p:nvGrpSpPr>
-        <p:cNvPr id="1" name=""/>
-        <p:cNvGrpSpPr/>
-        <p:nvPr/>
-      </p:nvGrpSpPr>
-      <p:grpSpPr>
-        <a:xfrm>
-          <a:off x="0" y="0"/>
-          <a:ext cx="0" cy="0"/>
-          <a:chOff x="0" y="0"/>
-          <a:chExt cx="0" cy="0"/>
-        </a:xfrm>
-      </p:grpSpPr>
-      <p:sp>
-        <p:nvSpPr>
-          <p:cNvPr id="2" name="Text 0"/>
-          <p:cNvSpPr/>
-          <p:nvPr/>
-        </p:nvSpPr>
-        <p:spPr>
-          <a:xfrm>
-            <a:off x="384048" y="182880"/>
-            <a:ext cx="7498080" cy="502920"/>
-          </a:xfrm>
-          <a:prstGeom prst="rect">
-            <a:avLst/>
-          </a:prstGeom>
-          <a:noFill/>
-          <a:ln/>
-        </p:spPr>
-        <p:txBody>
-          <a:bodyPr wrap="square" lIns="0" tIns="0" rIns="0" bIns="0" rtlCol="0" anchor="ctr"/>
-          <a:lstStyle/>
-          <a:p>
-            <a:pPr indent="0" marL="0">
-              <a:buNone/>
-            </a:pPr>
-            <a:r>
-              <a:rPr lang="en-US" sz="2400" b="1" dirty="0">
-                <a:solidFill>
-                  <a:srgbClr val="1F4E79"/>
-                </a:solidFill>
-                <a:latin typeface="Arial" pitchFamily="34" charset="0"/>
-                <a:ea typeface="Arial" pitchFamily="34" charset="-122"/>
-                <a:cs typeface="Arial" pitchFamily="34" charset="-120"/>
-              </a:rPr>
-              <a:t>Introduction</a:t>
-            </a:r>
-            <a:endParaRPr lang="en-US" sz="2400" dirty="0"/>
-          </a:p>
-        </p:txBody>
-      </p:sp>
-      <p:sp>
-        <p:nvSpPr>
-          <p:cNvPr id="3" name="Shape 1"/>
-          <p:cNvSpPr/>
-          <p:nvPr/>
-        </p:nvSpPr>
-        <p:spPr>
-          <a:xfrm>
-            <a:off x="384048" y="731520"/>
-            <a:ext cx="8375904" cy="0"/>
-          </a:xfrm>
-          <a:prstGeom prst="line">
-            <a:avLst/>
-          </a:prstGeom>
-          <a:noFill/>
-          <a:ln w="12700">
-            <a:solidFill>
-              <a:srgbClr val="404040"/>
-            </a:solidFill>
-            <a:prstDash val="solid"/>
-          </a:ln>
-        </p:spPr>
-      </p:sp>
-      <p:sp>
-        <p:nvSpPr>
-          <p:cNvPr id="4" name="Text 2"/>
-          <p:cNvSpPr/>
-          <p:nvPr/>
-        </p:nvSpPr>
-        <p:spPr>
-          <a:xfrm>
-            <a:off x="4572000" y="768096"/>
-            <a:ext cx="4187952" cy="201168"/>
-          </a:xfrm>
-          <a:prstGeom prst="rect">
-            <a:avLst/>
-          </a:prstGeom>
-          <a:noFill/>
-          <a:ln/>
-        </p:spPr>
-        <p:txBody>
-          <a:bodyPr wrap="square" lIns="0" tIns="0" rIns="0" bIns="0" rtlCol="0" anchor="ctr"/>
-          <a:lstStyle/>
-          <a:p>
-            <a:pPr algn="r" indent="0" marL="0">
-              <a:buNone/>
-            </a:pPr>
-            <a:r>
-              <a:rPr lang="en-US" sz="800" i="1" dirty="0">
-                <a:solidFill>
-                  <a:srgbClr val="808080"/>
-                </a:solidFill>
-                <a:latin typeface="Calibri" pitchFamily="34" charset="0"/>
-                <a:ea typeface="Calibri" pitchFamily="34" charset="-122"/>
-                <a:cs typeface="Calibri" pitchFamily="34" charset="-120"/>
-              </a:rPr>
-              <a:t>J. Electrochem. Soc. 168 (2021) 040537 · Sci. Rep. 3 (2013) 2261</a:t>
-            </a:r>
-            <a:endParaRPr lang="en-US" sz="800" dirty="0"/>
-          </a:p>
-        </p:txBody>
-      </p:sp>
-      <p:sp>
-        <p:nvSpPr>
-          <p:cNvPr id="5" name="Text 3"/>
-          <p:cNvSpPr/>
-          <p:nvPr/>
-        </p:nvSpPr>
-        <p:spPr>
-          <a:xfrm>
-            <a:off x="384048" y="4800600"/>
-            <a:ext cx="2743200" cy="228600"/>
-          </a:xfrm>
-          <a:prstGeom prst="rect">
-            <a:avLst/>
-          </a:prstGeom>
-          <a:noFill/>
-          <a:ln/>
-        </p:spPr>
-        <p:txBody>
-          <a:bodyPr wrap="square" lIns="0" tIns="0" rIns="0" bIns="0" rtlCol="0" anchor="ctr"/>
-          <a:lstStyle/>
-          <a:p>
-            <a:pPr indent="0" marL="0">
-              <a:buNone/>
-            </a:pPr>
-            <a:r>
-              <a:rPr lang="en-US" sz="900" dirty="0">
-                <a:solidFill>
-                  <a:srgbClr val="A6A6A6"/>
-                </a:solidFill>
-                <a:latin typeface="Calibri" pitchFamily="34" charset="0"/>
-                <a:ea typeface="Calibri" pitchFamily="34" charset="-122"/>
-                <a:cs typeface="Calibri" pitchFamily="34" charset="-120"/>
-              </a:rPr>
-              <a:t>Battery Materials Lab.</a:t>
-            </a:r>
-            <a:endParaRPr lang="en-US" sz="900" dirty="0"/>
-          </a:p>
-        </p:txBody>
-      </p:sp>
-      <p:sp>
-        <p:nvSpPr>
-          <p:cNvPr id="6" name="Text 4"/>
-          <p:cNvSpPr/>
-          <p:nvPr/>
-        </p:nvSpPr>
-        <p:spPr>
-          <a:xfrm>
-            <a:off x="8229600" y="4800600"/>
-            <a:ext cx="530352" cy="228600"/>
-          </a:xfrm>
-          <a:prstGeom prst="rect">
-            <a:avLst/>
-          </a:prstGeom>
-          <a:noFill/>
-          <a:ln/>
-        </p:spPr>
-        <p:txBody>
-          <a:bodyPr wrap="square" lIns="0" tIns="0" rIns="0" bIns="0" rtlCol="0" anchor="ctr"/>
-          <a:lstStyle/>
-          <a:p>
-            <a:pPr algn="r" indent="0" marL="0">
-              <a:buNone/>
-            </a:pPr>
-            <a:r>
-              <a:rPr lang="en-US" sz="900" dirty="0">
-                <a:solidFill>
-                  <a:srgbClr val="A6A6A6"/>
-                </a:solidFill>
-                <a:latin typeface="Calibri" pitchFamily="34" charset="0"/>
-                <a:ea typeface="Calibri" pitchFamily="34" charset="-122"/>
-                <a:cs typeface="Calibri" pitchFamily="34" charset="-120"/>
-              </a:rPr>
-              <a:t>1</a:t>
-            </a:r>
-            <a:endParaRPr lang="en-US" sz="900" dirty="0"/>
-          </a:p>
-        </p:txBody>
-      </p:sp>
-      <p:sp>
-        <p:nvSpPr>
-          <p:cNvPr id="7" name="Text 5"/>
-          <p:cNvSpPr/>
-          <p:nvPr/>
-        </p:nvSpPr>
-        <p:spPr>
-          <a:xfrm>
-            <a:off x="502920" y="914400"/>
-            <a:ext cx="8138160" cy="1143000"/>
-          </a:xfrm>
-          <a:prstGeom prst="rect">
-            <a:avLst/>
-          </a:prstGeom>
-          <a:noFill/>
-          <a:ln/>
-        </p:spPr>
-        <p:txBody>
-          <a:bodyPr wrap="square" lIns="0" tIns="0" rIns="0" bIns="0" rtlCol="0" anchor="t"/>
-          <a:lstStyle/>
-          <a:p>
-            <a:pPr indent="0" marL="0">
-              <a:lnSpc>
-                <a:spcPts val="1800"/>
-              </a:lnSpc>
-              <a:spcAft>
-                <a:spcPts val="500"/>
-              </a:spcAft>
-              <a:buNone/>
-            </a:pPr>
-            <a:r>
-              <a:rPr lang="en-US" sz="1400" b="1" dirty="0">
-                <a:solidFill>
-                  <a:srgbClr val="C00000"/>
-                </a:solidFill>
-                <a:latin typeface="Calibri" pitchFamily="34" charset="0"/>
-                <a:ea typeface="Calibri" pitchFamily="34" charset="-122"/>
-                <a:cs typeface="Calibri" pitchFamily="34" charset="-120"/>
-              </a:rPr>
-              <a:t>■  </a:t>
-            </a:r>
-            <a:pPr indent="0" marL="0">
-              <a:lnSpc>
-                <a:spcPts val="1800"/>
-              </a:lnSpc>
-              <a:spcAft>
-                <a:spcPts val="500"/>
-              </a:spcAft>
-              <a:buNone/>
-            </a:pPr>
-            <a:r>
-              <a:rPr lang="en-US" sz="1400" b="1" dirty="0">
-                <a:solidFill>
-                  <a:srgbClr val="262626"/>
-                </a:solidFill>
-                <a:latin typeface="Calibri" pitchFamily="34" charset="0"/>
-                <a:ea typeface="Calibri" pitchFamily="34" charset="-122"/>
-                <a:cs typeface="Calibri" pitchFamily="34" charset="-120"/>
-              </a:rPr>
-              <a:t>In an all-solid-state cathode, performance is decided by microstructure</a:t>
-            </a:r>
-            <a:endParaRPr lang="en-US" sz="1400" dirty="0"/>
-          </a:p>
-          <a:p>
-            <a:pPr indent="0" marL="0">
-              <a:lnSpc>
-                <a:spcPts val="1800"/>
-              </a:lnSpc>
-              <a:spcAft>
-                <a:spcPts val="500"/>
-              </a:spcAft>
-              <a:buNone/>
-            </a:pPr>
-            <a:r>
-              <a:rPr lang="en-US" sz="1300" dirty="0">
-                <a:solidFill>
-                  <a:srgbClr val="808080"/>
-                </a:solidFill>
-                <a:latin typeface="Calibri" pitchFamily="34" charset="0"/>
-                <a:ea typeface="Calibri" pitchFamily="34" charset="-122"/>
-                <a:cs typeface="Calibri" pitchFamily="34" charset="-120"/>
-              </a:rPr>
-              <a:t>     ·   </a:t>
-            </a:r>
-            <a:pPr indent="0" marL="0">
-              <a:lnSpc>
-                <a:spcPts val="1800"/>
-              </a:lnSpc>
-              <a:spcAft>
-                <a:spcPts val="500"/>
-              </a:spcAft>
-              <a:buNone/>
-            </a:pPr>
-            <a:r>
-              <a:rPr lang="en-US" sz="1300" dirty="0">
-                <a:solidFill>
-                  <a:srgbClr val="262626"/>
-                </a:solidFill>
-                <a:latin typeface="Calibri" pitchFamily="34" charset="0"/>
-                <a:ea typeface="Calibri" pitchFamily="34" charset="-122"/>
-                <a:cs typeface="Calibri" pitchFamily="34" charset="-120"/>
-              </a:rPr>
-              <a:t>In a liquid cell the electrolyte </a:t>
-            </a:r>
-            <a:pPr indent="0" marL="0">
-              <a:lnSpc>
-                <a:spcPts val="1800"/>
-              </a:lnSpc>
-              <a:spcAft>
-                <a:spcPts val="500"/>
-              </a:spcAft>
-              <a:buNone/>
-            </a:pPr>
-            <a:r>
-              <a:rPr lang="en-US" sz="1300" b="1" dirty="0">
-                <a:solidFill>
-                  <a:srgbClr val="2E74B5"/>
-                </a:solidFill>
-                <a:latin typeface="Calibri" pitchFamily="34" charset="0"/>
-                <a:ea typeface="Calibri" pitchFamily="34" charset="-122"/>
-                <a:cs typeface="Calibri" pitchFamily="34" charset="-120"/>
-              </a:rPr>
-              <a:t>soaks every particle</a:t>
-            </a:r>
-            <a:pPr indent="0" marL="0">
-              <a:lnSpc>
-                <a:spcPts val="1800"/>
-              </a:lnSpc>
-              <a:spcAft>
-                <a:spcPts val="500"/>
-              </a:spcAft>
-              <a:buNone/>
-            </a:pPr>
-            <a:r>
-              <a:rPr lang="en-US" sz="1300" dirty="0">
-                <a:solidFill>
-                  <a:srgbClr val="262626"/>
-                </a:solidFill>
-                <a:latin typeface="Calibri" pitchFamily="34" charset="0"/>
-                <a:ea typeface="Calibri" pitchFamily="34" charset="-122"/>
-                <a:cs typeface="Calibri" pitchFamily="34" charset="-120"/>
-              </a:rPr>
-              <a:t>. In a solid cell, Li</a:t>
-            </a:r>
-            <a:pPr indent="0" marL="0">
-              <a:lnSpc>
-                <a:spcPts val="1800"/>
-              </a:lnSpc>
-              <a:spcAft>
-                <a:spcPts val="500"/>
-              </a:spcAft>
-              <a:buNone/>
-            </a:pPr>
-            <a:r>
-              <a:rPr lang="en-US" sz="1300" dirty="0">
-                <a:solidFill>
-                  <a:srgbClr val="262626"/>
-                </a:solidFill>
-                <a:latin typeface="Calibri" pitchFamily="34" charset="0"/>
-                <a:ea typeface="Calibri" pitchFamily="34" charset="-122"/>
-                <a:cs typeface="Calibri" pitchFamily="34" charset="-120"/>
-              </a:rPr>
-              <a:t>+</a:t>
-            </a:r>
-            <a:pPr indent="0" marL="0">
-              <a:lnSpc>
-                <a:spcPts val="1800"/>
-              </a:lnSpc>
-              <a:spcAft>
-                <a:spcPts val="500"/>
-              </a:spcAft>
-              <a:buNone/>
-            </a:pPr>
-            <a:r>
-              <a:rPr lang="en-US" sz="1300" dirty="0">
-                <a:solidFill>
-                  <a:srgbClr val="262626"/>
-                </a:solidFill>
-                <a:latin typeface="Calibri" pitchFamily="34" charset="0"/>
-                <a:ea typeface="Calibri" pitchFamily="34" charset="-122"/>
-                <a:cs typeface="Calibri" pitchFamily="34" charset="-120"/>
-              </a:rPr>
-              <a:t> passes only where powders were </a:t>
-            </a:r>
-            <a:pPr indent="0" marL="0">
-              <a:lnSpc>
-                <a:spcPts val="1800"/>
-              </a:lnSpc>
-              <a:spcAft>
-                <a:spcPts val="500"/>
-              </a:spcAft>
-              <a:buNone/>
-            </a:pPr>
-            <a:r>
-              <a:rPr lang="en-US" sz="1300" b="1" dirty="0">
-                <a:solidFill>
-                  <a:srgbClr val="C00000"/>
-                </a:solidFill>
-                <a:latin typeface="Calibri" pitchFamily="34" charset="0"/>
-                <a:ea typeface="Calibri" pitchFamily="34" charset="-122"/>
-                <a:cs typeface="Calibri" pitchFamily="34" charset="-120"/>
-              </a:rPr>
-              <a:t>pressed into contact</a:t>
-            </a:r>
-            <a:pPr indent="0" marL="0">
-              <a:lnSpc>
-                <a:spcPts val="1800"/>
-              </a:lnSpc>
-              <a:spcAft>
-                <a:spcPts val="500"/>
-              </a:spcAft>
-              <a:buNone/>
-            </a:pPr>
-            <a:r>
-              <a:rPr lang="en-US" sz="1300" dirty="0">
-                <a:solidFill>
-                  <a:srgbClr val="262626"/>
-                </a:solidFill>
-                <a:latin typeface="Calibri" pitchFamily="34" charset="0"/>
-                <a:ea typeface="Calibri" pitchFamily="34" charset="-122"/>
-                <a:cs typeface="Calibri" pitchFamily="34" charset="-120"/>
-              </a:rPr>
-              <a:t>.</a:t>
-            </a:r>
-            <a:endParaRPr lang="en-US" sz="1400" dirty="0"/>
-          </a:p>
-          <a:p>
-            <a:pPr indent="0" marL="0">
-              <a:lnSpc>
-                <a:spcPts val="1800"/>
-              </a:lnSpc>
-              <a:spcAft>
-                <a:spcPts val="500"/>
-              </a:spcAft>
-              <a:buNone/>
-            </a:pPr>
-            <a:r>
-              <a:rPr lang="en-US" sz="1300" dirty="0">
-                <a:solidFill>
-                  <a:srgbClr val="808080"/>
-                </a:solidFill>
-                <a:latin typeface="Calibri" pitchFamily="34" charset="0"/>
-                <a:ea typeface="Calibri" pitchFamily="34" charset="-122"/>
-                <a:cs typeface="Calibri" pitchFamily="34" charset="-120"/>
-              </a:rPr>
-              <a:t>     ·   </a:t>
-            </a:r>
-            <a:pPr indent="0" marL="0">
-              <a:lnSpc>
-                <a:spcPts val="1800"/>
-              </a:lnSpc>
-              <a:spcAft>
-                <a:spcPts val="500"/>
-              </a:spcAft>
-              <a:buNone/>
-            </a:pPr>
-            <a:r>
-              <a:rPr lang="en-US" sz="1300" dirty="0">
-                <a:solidFill>
-                  <a:srgbClr val="262626"/>
-                </a:solidFill>
-                <a:latin typeface="Calibri" pitchFamily="34" charset="0"/>
-                <a:ea typeface="Calibri" pitchFamily="34" charset="-122"/>
-                <a:cs typeface="Calibri" pitchFamily="34" charset="-120"/>
-              </a:rPr>
-              <a:t>Cathode = active material (AM, NCM811) + solid electrolyte (SE, Li</a:t>
-            </a:r>
-            <a:pPr indent="0" marL="0">
-              <a:lnSpc>
-                <a:spcPts val="1800"/>
-              </a:lnSpc>
-              <a:spcAft>
-                <a:spcPts val="500"/>
-              </a:spcAft>
-              <a:buNone/>
-            </a:pPr>
-            <a:r>
-              <a:rPr lang="en-US" sz="1300" dirty="0">
-                <a:solidFill>
-                  <a:srgbClr val="262626"/>
-                </a:solidFill>
-                <a:latin typeface="Calibri" pitchFamily="34" charset="0"/>
-                <a:ea typeface="Calibri" pitchFamily="34" charset="-122"/>
-                <a:cs typeface="Calibri" pitchFamily="34" charset="-120"/>
-              </a:rPr>
-              <a:t>6</a:t>
-            </a:r>
-            <a:pPr indent="0" marL="0">
-              <a:lnSpc>
-                <a:spcPts val="1800"/>
-              </a:lnSpc>
-              <a:spcAft>
-                <a:spcPts val="500"/>
-              </a:spcAft>
-              <a:buNone/>
-            </a:pPr>
-            <a:r>
-              <a:rPr lang="en-US" sz="1300" dirty="0">
-                <a:solidFill>
-                  <a:srgbClr val="262626"/>
-                </a:solidFill>
-                <a:latin typeface="Calibri" pitchFamily="34" charset="0"/>
-                <a:ea typeface="Calibri" pitchFamily="34" charset="-122"/>
-                <a:cs typeface="Calibri" pitchFamily="34" charset="-120"/>
-              </a:rPr>
-              <a:t>PS</a:t>
-            </a:r>
-            <a:pPr indent="0" marL="0">
-              <a:lnSpc>
-                <a:spcPts val="1800"/>
-              </a:lnSpc>
-              <a:spcAft>
-                <a:spcPts val="500"/>
-              </a:spcAft>
-              <a:buNone/>
-            </a:pPr>
-            <a:r>
-              <a:rPr lang="en-US" sz="1300" dirty="0">
-                <a:solidFill>
-                  <a:srgbClr val="262626"/>
-                </a:solidFill>
-                <a:latin typeface="Calibri" pitchFamily="34" charset="0"/>
-                <a:ea typeface="Calibri" pitchFamily="34" charset="-122"/>
-                <a:cs typeface="Calibri" pitchFamily="34" charset="-120"/>
-              </a:rPr>
-              <a:t>5</a:t>
-            </a:r>
-            <a:pPr indent="0" marL="0">
-              <a:lnSpc>
-                <a:spcPts val="1800"/>
-              </a:lnSpc>
-              <a:spcAft>
-                <a:spcPts val="500"/>
-              </a:spcAft>
-              <a:buNone/>
-            </a:pPr>
-            <a:r>
-              <a:rPr lang="en-US" sz="1300" dirty="0">
-                <a:solidFill>
-                  <a:srgbClr val="262626"/>
-                </a:solidFill>
-                <a:latin typeface="Calibri" pitchFamily="34" charset="0"/>
-                <a:ea typeface="Calibri" pitchFamily="34" charset="-122"/>
-                <a:cs typeface="Calibri" pitchFamily="34" charset="-120"/>
-              </a:rPr>
-              <a:t>Cl) powders, cold-pressed at </a:t>
-            </a:r>
-            <a:pPr indent="0" marL="0">
-              <a:lnSpc>
-                <a:spcPts val="1800"/>
-              </a:lnSpc>
-              <a:spcAft>
-                <a:spcPts val="500"/>
-              </a:spcAft>
-              <a:buNone/>
-            </a:pPr>
-            <a:r>
-              <a:rPr lang="en-US" sz="1300" b="1" dirty="0">
-                <a:solidFill>
-                  <a:srgbClr val="262626"/>
-                </a:solidFill>
-                <a:latin typeface="Calibri" pitchFamily="34" charset="0"/>
-                <a:ea typeface="Calibri" pitchFamily="34" charset="-122"/>
-                <a:cs typeface="Calibri" pitchFamily="34" charset="-120"/>
-              </a:rPr>
-              <a:t>300 MPa</a:t>
-            </a:r>
-            <a:pPr indent="0" marL="0">
-              <a:lnSpc>
-                <a:spcPts val="1800"/>
-              </a:lnSpc>
-              <a:spcAft>
-                <a:spcPts val="500"/>
-              </a:spcAft>
-              <a:buNone/>
-            </a:pPr>
-            <a:r>
-              <a:rPr lang="en-US" sz="1300" dirty="0">
-                <a:solidFill>
-                  <a:srgbClr val="262626"/>
-                </a:solidFill>
-                <a:latin typeface="Calibri" pitchFamily="34" charset="0"/>
-                <a:ea typeface="Calibri" pitchFamily="34" charset="-122"/>
-                <a:cs typeface="Calibri" pitchFamily="34" charset="-120"/>
-              </a:rPr>
-              <a:t>.</a:t>
-            </a:r>
-            <a:endParaRPr lang="en-US" sz="1400" dirty="0"/>
-          </a:p>
-          <a:p>
-            <a:pPr indent="0" marL="0">
-              <a:lnSpc>
-                <a:spcPts val="1800"/>
-              </a:lnSpc>
-              <a:spcAft>
-                <a:spcPts val="500"/>
-              </a:spcAft>
-              <a:buNone/>
-            </a:pPr>
-            <a:r>
-              <a:rPr lang="en-US" sz="1300" dirty="0">
-                <a:solidFill>
-                  <a:srgbClr val="808080"/>
-                </a:solidFill>
-                <a:latin typeface="Calibri" pitchFamily="34" charset="0"/>
-                <a:ea typeface="Calibri" pitchFamily="34" charset="-122"/>
-                <a:cs typeface="Calibri" pitchFamily="34" charset="-120"/>
-              </a:rPr>
-              <a:t>     ·   </a:t>
-            </a:r>
-            <a:pPr indent="0" marL="0">
-              <a:lnSpc>
-                <a:spcPts val="1800"/>
-              </a:lnSpc>
-              <a:spcAft>
-                <a:spcPts val="500"/>
-              </a:spcAft>
-              <a:buNone/>
-            </a:pPr>
-            <a:r>
-              <a:rPr lang="en-US" sz="1300" dirty="0">
-                <a:solidFill>
-                  <a:srgbClr val="262626"/>
-                </a:solidFill>
-                <a:latin typeface="Calibri" pitchFamily="34" charset="0"/>
-                <a:ea typeface="Calibri" pitchFamily="34" charset="-122"/>
-                <a:cs typeface="Calibri" pitchFamily="34" charset="-120"/>
-              </a:rPr>
-              <a:t>⇒ What decides performance is </a:t>
-            </a:r>
-            <a:pPr indent="0" marL="0">
-              <a:lnSpc>
-                <a:spcPts val="1800"/>
-              </a:lnSpc>
-              <a:spcAft>
-                <a:spcPts val="500"/>
-              </a:spcAft>
-              <a:buNone/>
-            </a:pPr>
-            <a:r>
-              <a:rPr lang="en-US" sz="1300" b="1" dirty="0">
-                <a:solidFill>
-                  <a:srgbClr val="2E74B5"/>
-                </a:solidFill>
-                <a:latin typeface="Calibri" pitchFamily="34" charset="0"/>
-                <a:ea typeface="Calibri" pitchFamily="34" charset="-122"/>
-                <a:cs typeface="Calibri" pitchFamily="34" charset="-120"/>
-              </a:rPr>
-              <a:t>not the chemical formula but the microstructure</a:t>
-            </a:r>
-            <a:pPr indent="0" marL="0">
-              <a:lnSpc>
-                <a:spcPts val="1800"/>
-              </a:lnSpc>
-              <a:spcAft>
-                <a:spcPts val="500"/>
-              </a:spcAft>
-              <a:buNone/>
-            </a:pPr>
-            <a:r>
-              <a:rPr lang="en-US" sz="1300" dirty="0">
-                <a:solidFill>
-                  <a:srgbClr val="262626"/>
-                </a:solidFill>
-                <a:latin typeface="Calibri" pitchFamily="34" charset="0"/>
-                <a:ea typeface="Calibri" pitchFamily="34" charset="-122"/>
-                <a:cs typeface="Calibri" pitchFamily="34" charset="-120"/>
-              </a:rPr>
-              <a:t> — porosity, where particles touch, and how ions/electrons flow through those contacts.</a:t>
-            </a:r>
-            <a:endParaRPr lang="en-US" sz="1400" dirty="0"/>
-          </a:p>
-        </p:txBody>
-      </p:sp>
-      <p:sp>
-        <p:nvSpPr>
-          <p:cNvPr id="8" name="Shape 6"/>
-          <p:cNvSpPr/>
-          <p:nvPr/>
-        </p:nvSpPr>
-        <p:spPr>
-          <a:xfrm>
-            <a:off x="548640" y="2194560"/>
-            <a:ext cx="3886200" cy="1874520"/>
-          </a:xfrm>
-          <a:prstGeom prst="rect">
-            <a:avLst/>
-          </a:prstGeom>
-          <a:solidFill>
-            <a:srgbClr val="FAFAFA"/>
-          </a:solidFill>
-          <a:ln w="9525">
-            <a:solidFill>
-              <a:srgbClr val="BFBFBF"/>
-            </a:solidFill>
-            <a:prstDash val="dash"/>
-          </a:ln>
-        </p:spPr>
-      </p:sp>
-      <p:sp>
-        <p:nvSpPr>
-          <p:cNvPr id="9" name="Text 7"/>
-          <p:cNvSpPr/>
-          <p:nvPr/>
-        </p:nvSpPr>
-        <p:spPr>
-          <a:xfrm>
-            <a:off x="621792" y="2194560"/>
-            <a:ext cx="3739896" cy="1874520"/>
-          </a:xfrm>
-          <a:prstGeom prst="rect">
-            <a:avLst/>
-          </a:prstGeom>
-          <a:noFill/>
-          <a:ln/>
-        </p:spPr>
-        <p:txBody>
-          <a:bodyPr wrap="square" lIns="0" tIns="0" rIns="0" bIns="0" rtlCol="0" anchor="ctr"/>
-          <a:lstStyle/>
-          <a:p>
-            <a:pPr algn="ctr" indent="0" marL="0">
-              <a:buNone/>
-            </a:pPr>
-            <a:r>
-              <a:rPr lang="en-US" sz="950" dirty="0">
-                <a:solidFill>
-                  <a:srgbClr val="808080"/>
-                </a:solidFill>
-                <a:latin typeface="Calibri" pitchFamily="34" charset="0"/>
-                <a:ea typeface="Calibri" pitchFamily="34" charset="-122"/>
-                <a:cs typeface="Calibri" pitchFamily="34" charset="-120"/>
-              </a:rPr>
-              <a:t>[Fig] liquid cell (fully wetted) vs solid cell (contact points only)</a:t>
-            </a:r>
-            <a:endParaRPr lang="en-US" sz="950" dirty="0"/>
-          </a:p>
-          <a:p>
-            <a:pPr algn="ctr" indent="0" marL="0">
-              <a:buNone/>
-            </a:pPr>
-            <a:r>
-              <a:rPr lang="en-US" sz="950" dirty="0">
-                <a:solidFill>
-                  <a:srgbClr val="808080"/>
-                </a:solidFill>
-                <a:latin typeface="Calibri" pitchFamily="34" charset="0"/>
-                <a:ea typeface="Calibri" pitchFamily="34" charset="-122"/>
-                <a:cs typeface="Calibri" pitchFamily="34" charset="-120"/>
-              </a:rPr>
-              <a:t>★ 이 덱에서 가장 중요한 그림 — 새로 그려야 함</a:t>
-            </a:r>
-            <a:endParaRPr lang="en-US" sz="950" dirty="0"/>
-          </a:p>
-        </p:txBody>
-      </p:sp>
-      <p:sp>
-        <p:nvSpPr>
-          <p:cNvPr id="10" name="Shape 8"/>
-          <p:cNvSpPr/>
-          <p:nvPr/>
-        </p:nvSpPr>
-        <p:spPr>
-          <a:xfrm>
-            <a:off x="4709160" y="2194560"/>
-            <a:ext cx="3886200" cy="1874520"/>
-          </a:xfrm>
-          <a:prstGeom prst="rect">
-            <a:avLst/>
-          </a:prstGeom>
-          <a:solidFill>
-            <a:srgbClr val="FAFAFA"/>
-          </a:solidFill>
-          <a:ln w="9525">
-            <a:solidFill>
-              <a:srgbClr val="BFBFBF"/>
-            </a:solidFill>
-            <a:prstDash val="dash"/>
-          </a:ln>
-        </p:spPr>
-      </p:sp>
-      <p:sp>
-        <p:nvSpPr>
-          <p:cNvPr id="11" name="Text 9"/>
-          <p:cNvSpPr/>
-          <p:nvPr/>
-        </p:nvSpPr>
-        <p:spPr>
-          <a:xfrm>
-            <a:off x="4782312" y="2194560"/>
-            <a:ext cx="3739896" cy="1874520"/>
-          </a:xfrm>
-          <a:prstGeom prst="rect">
-            <a:avLst/>
-          </a:prstGeom>
-          <a:noFill/>
-          <a:ln/>
-        </p:spPr>
-        <p:txBody>
-          <a:bodyPr wrap="square" lIns="0" tIns="0" rIns="0" bIns="0" rtlCol="0" anchor="ctr"/>
-          <a:lstStyle/>
-          <a:p>
-            <a:pPr algn="ctr" indent="0" marL="0">
-              <a:buNone/>
-            </a:pPr>
-            <a:r>
-              <a:rPr lang="en-US" sz="950" dirty="0">
-                <a:solidFill>
-                  <a:srgbClr val="808080"/>
-                </a:solidFill>
-                <a:latin typeface="Calibri" pitchFamily="34" charset="0"/>
-                <a:ea typeface="Calibri" pitchFamily="34" charset="-122"/>
-                <a:cs typeface="Calibri" pitchFamily="34" charset="-120"/>
-              </a:rPr>
-              <a:t>[Fig] cold-pressed composite cathode</a:t>
-            </a:r>
-            <a:endParaRPr lang="en-US" sz="950" dirty="0"/>
-          </a:p>
-          <a:p>
-            <a:pPr algn="ctr" indent="0" marL="0">
-              <a:buNone/>
-            </a:pPr>
-            <a:r>
-              <a:rPr lang="en-US" sz="950" dirty="0">
-                <a:solidFill>
-                  <a:srgbClr val="808080"/>
-                </a:solidFill>
-                <a:latin typeface="Calibri" pitchFamily="34" charset="0"/>
-                <a:ea typeface="Calibri" pitchFamily="34" charset="-122"/>
-                <a:cs typeface="Calibri" pitchFamily="34" charset="-120"/>
-              </a:rPr>
-              <a:t>cross-section (SEM)</a:t>
-            </a:r>
-            <a:endParaRPr lang="en-US" sz="950" dirty="0"/>
-          </a:p>
-        </p:txBody>
-      </p:sp>
-      <p:sp>
-        <p:nvSpPr>
-          <p:cNvPr id="12" name="Shape 10"/>
-          <p:cNvSpPr/>
-          <p:nvPr/>
-        </p:nvSpPr>
-        <p:spPr>
-          <a:xfrm>
-            <a:off x="502920" y="4224528"/>
-            <a:ext cx="8138160" cy="475488"/>
-          </a:xfrm>
-          <a:prstGeom prst="roundRect">
-            <a:avLst>
-              <a:gd name="adj" fmla="val 11538"/>
-            </a:avLst>
-          </a:prstGeom>
-          <a:solidFill>
-            <a:srgbClr val="EAF1F8"/>
-          </a:solidFill>
-          <a:ln w="9525">
-            <a:solidFill>
-              <a:srgbClr val="2E74B5"/>
-            </a:solidFill>
-            <a:prstDash val="solid"/>
-          </a:ln>
-        </p:spPr>
-      </p:sp>
-      <p:sp>
-        <p:nvSpPr>
-          <p:cNvPr id="13" name="Text 11"/>
-          <p:cNvSpPr/>
-          <p:nvPr/>
-        </p:nvSpPr>
-        <p:spPr>
-          <a:xfrm>
-            <a:off x="658368" y="4224528"/>
-            <a:ext cx="7827264" cy="475488"/>
-          </a:xfrm>
-          <a:prstGeom prst="rect">
-            <a:avLst/>
-          </a:prstGeom>
-          <a:noFill/>
-          <a:ln/>
-        </p:spPr>
-        <p:txBody>
-          <a:bodyPr wrap="square" lIns="0" tIns="0" rIns="0" bIns="0" rtlCol="0" anchor="ctr"/>
-          <a:lstStyle/>
-          <a:p>
-            <a:pPr indent="0" marL="0">
-              <a:buNone/>
-            </a:pPr>
-            <a:r>
-              <a:rPr lang="en-US" sz="1150" b="1" dirty="0">
-                <a:solidFill>
-                  <a:srgbClr val="1F4E79"/>
-                </a:solidFill>
-                <a:latin typeface="Calibri" pitchFamily="34" charset="0"/>
-                <a:ea typeface="Calibri" pitchFamily="34" charset="-122"/>
-                <a:cs typeface="Calibri" pitchFamily="34" charset="-120"/>
-              </a:rPr>
-              <a:t>Same composition, different pressing → different performance.  To see "how", we must look inside.</a:t>
-            </a:r>
-            <a:endParaRPr lang="en-US" sz="1150" dirty="0"/>
-          </a:p>
-        </p:txBody>
-      </p:sp>
     </p:spTree>
   </p:cSld>
   <p:clrMapOvr>

--- a/docs/seminar/seminar_20260806.pptx
+++ b/docs/seminar/seminar_20260806.pptx
@@ -3004,7 +3004,10 @@
           <a:p>
             <a:r>
               <a:rPr lang="en-US" dirty="0"/>
-              <a:t>Q: "전이가 기각됐으면 지금까지 결과가 다 틀린 것 아니냐" — 아닙니다. 기각된 것은 곡선을 다른 전극에 옮기는 것이고, 각 전극에서 직접 계산한 값은 무관합니다. 4번은 제 사전 예상이 부호부터 틀렸던 경우입니다 — 미해상이면 뻣뻣해질 줄 알았는데 실제로는 협착이 격자에서 사라져 오히려 무릅니다. 그래서 정밀화가 효과를 키웁니다.</a:t>
+              <a:t>Q: "전이가 기각됐으면 지금까지 결과가 다 틀린 것 아니냐" — 아닙니다. 기각된 것은 곡선을 다른 전극에 옮기는 것이고, 각 전극에서 직접 계산한 값은 무관합니다.
+4번은 제 사전 예상이 부호부터 틀렸던 경우입니다 — 미해상이면 뻣뻣해질 줄 알았는데 실제로는 협착이 격자에서 사라져 오히려 무릅니다.
+Q: "그럼 지수 −0.66 이 참값이냐" — 아닙니다. 세 격자의 증분이 +0.170, +0.163 로 거의 안 줄어 겉보기 수렴차수가 0.10 입니다. 즉 아직 수렴 전이고, 하한으로만 보고합니다. 완전 해상하려면 n_grid ~900 이 필요한데 384 조차 35 GB 로 V100 을 넘습니다.
+Q: "그럼 기준곡선도 못 믿는 것 아니냐" — 아닙니다. 민감도는 채널당 셀 수의 함수이고, 기준곡선은 3.56~5.41 셀에서 쟀습니다. 그 밴드에서는 2.25배 정밀화에 4 % 만 움직입니다.</a:t>
             </a:r>
             <a:endParaRPr lang="en-US" dirty="0"/>
           </a:p>
@@ -11971,7 +11974,7 @@
                 <a:ea typeface="Calibri" pitchFamily="34" charset="-122"/>
                 <a:cs typeface="Calibri" pitchFamily="34" charset="-120"/>
               </a:rPr>
-              <a:t>Not a grid artefact</a:t>
+              <a:t>Not a grid artefact — refining makes it stronger</a:t>
             </a:r>
             <a:pPr indent="0" marL="0">
               <a:lnSpc>
@@ -11991,7 +11994,7 @@
                 <a:ea typeface="Calibri" pitchFamily="34" charset="-122"/>
                 <a:cs typeface="Calibri" pitchFamily="34" charset="-120"/>
               </a:rPr>
-              <a:t> — refining the grid </a:t>
+              <a:t>.  Three grids (1.18 / 1.77 / 2.65 cells across the narrowest channel) give </a:t>
             </a:r>
             <a:pPr indent="0" marL="0">
               <a:lnSpc>
@@ -12011,7 +12014,7 @@
                 <a:ea typeface="Calibri" pitchFamily="34" charset="-122"/>
                 <a:cs typeface="Calibri" pitchFamily="34" charset="-120"/>
               </a:rPr>
-              <a:t>strengthens</a:t>
+              <a:t>1.70 -&gt; 1.87 -&gt; 2.03</a:t>
             </a:r>
             <a:pPr indent="0" marL="0">
               <a:lnSpc>
@@ -12031,7 +12034,7 @@
                 <a:ea typeface="Calibri" pitchFamily="34" charset="-122"/>
                 <a:cs typeface="Calibri" pitchFamily="34" charset="-120"/>
               </a:rPr>
-              <a:t> the effect (+5-10 %): an unresolved constriction simply vanishes and lets material through.  So -0.54 is a </a:t>
+              <a:t>, monotonic.  An unresolved constriction simply vanishes and lets material through, so coarse grids </a:t>
             </a:r>
             <a:pPr indent="0" marL="0">
               <a:lnSpc>
@@ -12051,7 +12054,7 @@
                 <a:ea typeface="Calibri" pitchFamily="34" charset="-122"/>
                 <a:cs typeface="Calibri" pitchFamily="34" charset="-120"/>
               </a:rPr>
-              <a:t>lower bound</a:t>
+              <a:t>under-report</a:t>
             </a:r>
             <a:pPr indent="0" marL="0">
               <a:lnSpc>
@@ -12071,7 +12074,47 @@
                 <a:ea typeface="Calibri" pitchFamily="34" charset="-122"/>
                 <a:cs typeface="Calibri" pitchFamily="34" charset="-120"/>
               </a:rPr>
-              <a:t> on the magnitude.</a:t>
+              <a:t> the effect.  Reported as a </a:t>
+            </a:r>
+            <a:pPr indent="0" marL="0">
+              <a:lnSpc>
+                <a:spcPts val="1800"/>
+              </a:lnSpc>
+              <a:spcAft>
+                <a:spcPts val="500"/>
+              </a:spcAft>
+              <a:buNone/>
+            </a:pPr>
+            <a:r>
+              <a:rPr lang="en-US" sz="1000" b="1" dirty="0">
+                <a:solidFill>
+                  <a:srgbClr val="262626"/>
+                </a:solidFill>
+                <a:latin typeface="Calibri" pitchFamily="34" charset="0"/>
+                <a:ea typeface="Calibri" pitchFamily="34" charset="-122"/>
+                <a:cs typeface="Calibri" pitchFamily="34" charset="-120"/>
+              </a:rPr>
+              <a:t>lower bound: |slope| &gt;= 0.66</a:t>
+            </a:r>
+            <a:pPr indent="0" marL="0">
+              <a:lnSpc>
+                <a:spcPts val="1800"/>
+              </a:lnSpc>
+              <a:spcAft>
+                <a:spcPts val="500"/>
+              </a:spcAft>
+              <a:buNone/>
+            </a:pPr>
+            <a:r>
+              <a:rPr lang="en-US" sz="1000" dirty="0">
+                <a:solidFill>
+                  <a:srgbClr val="262626"/>
+                </a:solidFill>
+                <a:latin typeface="Calibri" pitchFamily="34" charset="0"/>
+                <a:ea typeface="Calibri" pitchFamily="34" charset="-122"/>
+                <a:cs typeface="Calibri" pitchFamily="34" charset="-120"/>
+              </a:rPr>
+              <a:t>.</a:t>
             </a:r>
             <a:endParaRPr lang="en-US" sz="1000" dirty="0"/>
           </a:p>
@@ -12137,7 +12180,7 @@
                 <a:ea typeface="Calibri" pitchFamily="34" charset="-122"/>
                 <a:cs typeface="Calibri" pitchFamily="34" charset="-120"/>
               </a:rPr>
-              <a:t>A rejected assumption became a mechanism, a descriptor, and a convergence check — that is a result.</a:t>
+              <a:t>Sensitivity scales with cells-per-channel: &gt;= 3.5 cells moves only 4 % under a 2.25x refinement, 1.2 cells moves 24 % — a pre-run check we now apply to every bed.</a:t>
             </a:r>
             <a:endParaRPr lang="en-US" sz="1150" dirty="0"/>
           </a:p>

--- a/docs/seminar/seminar_20260806.pptx
+++ b/docs/seminar/seminar_20260806.pptx
@@ -14750,7 +14750,28 @@
                           <a:ea typeface="Calibri" pitchFamily="34" charset="-122"/>
                           <a:cs typeface="Calibri" pitchFamily="34" charset="-120"/>
                         </a:rPr>
-                        <a:t>E = 24 GPa</a:t>
+                        <a:t>E = 24 GPa (Young)</a:t>
+                      </a:r>
+                      <a:endParaRPr lang="en-US" sz="1050" dirty="0">
+                        <a:latin typeface="Calibri" charset="0"/>
+                        <a:ea typeface="Calibri" charset="0"/>
+                        <a:cs typeface="Calibri" charset="0"/>
+                      </a:endParaRPr>
+                    </a:p>
+                    <a:p>
+                      <a:pPr algn="l" indent="0" marL="0">
+                        <a:buNone/>
+                      </a:pPr>
+                      <a:r>
+                        <a:rPr lang="en-US" sz="1050" dirty="0">
+                          <a:solidFill>
+                            <a:srgbClr val="262626"/>
+                          </a:solidFill>
+                          <a:latin typeface="Calibri" pitchFamily="34" charset="0"/>
+                          <a:ea typeface="Calibri" pitchFamily="34" charset="-122"/>
+                          <a:cs typeface="Calibri" pitchFamily="34" charset="-120"/>
+                        </a:rPr>
+                        <a:t>B0 = 26.2 GPa (bulk, our DFT)</a:t>
                       </a:r>
                       <a:endParaRPr lang="en-US" sz="1050" dirty="0">
                         <a:latin typeface="Calibri" charset="0"/>
@@ -14818,7 +14839,7 @@
                           <a:ea typeface="Calibri" pitchFamily="34" charset="-122"/>
                           <a:cs typeface="Calibri" pitchFamily="34" charset="-120"/>
                         </a:rPr>
-                        <a:t>measured single-crystal / dense-pellet modulus (literature)</a:t>
+                        <a:t>E from literature; the bulk modulus B0 is the quantity to compare against K, and comes from our own equation-of-state calculation</a:t>
                       </a:r>
                       <a:endParaRPr lang="en-US" sz="1050" dirty="0">
                         <a:latin typeface="Calibri" charset="0"/>
@@ -15251,7 +15272,7 @@
                           <a:ea typeface="Calibri" pitchFamily="34" charset="-122"/>
                           <a:cs typeface="Calibri" pitchFamily="34" charset="-120"/>
                         </a:rPr>
-                        <a:t>softening confined to SHEAR — bulk stiffness stays at the dense-solid value</a:t>
+                        <a:t>softening confined to SHEAR.  Bulk: our K 25.5 vs our DFT EOS B0 = 26.2 GPa (−2.8 %).  Shear: µ 0.51 vs the real 8.1 GPa = ~16x softer.  (Compare K to B0, never to E — different quantities.)</a:t>
                       </a:r>
                       <a:endParaRPr lang="en-US" sz="1050" dirty="0">
                         <a:latin typeface="Calibri" charset="0"/>

--- a/docs/seminar/seminar_20260806.pptx
+++ b/docs/seminar/seminar_20260806.pptx
@@ -5,6 +5,7 @@
     <p:sldMasterId id="2147483648" r:id="rId1"/>
   </p:sldMasterIdLst>
   <p:sldIdLst>
+    <p:sldId id="276" r:id="rId27"/>
     <p:sldId id="256" r:id="rId2"/>
     <p:sldId id="257" r:id="rId3"/>
     <p:sldId id="258" r:id="rId4"/>
@@ -20509,6 +20510,122 @@
 </p:sld>
 </file>
 
+<file path=ppt/slides/slide21.xml><?xml version="1.0" encoding="utf-8"?>
+<p:sld xmlns:a="http://schemas.openxmlformats.org/drawingml/2006/main" xmlns:p="http://schemas.openxmlformats.org/presentationml/2006/main" xmlns:r="http://schemas.openxmlformats.org/officeDocument/2006/relationships">
+  <p:cSld>
+    <p:spTree>
+      <p:nvGrpSpPr>
+        <p:cNvPr id="1" name=""/>
+        <p:cNvGrpSpPr/>
+        <p:nvPr/>
+      </p:nvGrpSpPr>
+      <p:grpSpPr/>
+      <p:sp>
+        <p:nvSpPr>
+          <p:cNvPr id="2" name="TextBox 1"/>
+          <p:cNvSpPr txBox="1"/>
+          <p:nvPr/>
+        </p:nvSpPr>
+        <p:spPr>
+          <a:xfrm>
+            <a:off x="640080" y="1131570"/>
+            <a:ext cx="7863840" cy="2880360"/>
+          </a:xfrm>
+          <a:prstGeom prst="rect">
+            <a:avLst/>
+          </a:prstGeom>
+          <a:noFill/>
+        </p:spPr>
+        <p:txBody>
+          <a:bodyPr wrap="square">
+            <a:spAutoFit/>
+          </a:bodyPr>
+          <a:lstStyle/>
+          <a:p>
+            <a:pPr>
+              <a:spcAft>
+                <a:spcPts val="1000"/>
+              </a:spcAft>
+            </a:pPr>
+            <a:r>
+              <a:rPr sz="3000" b="1">
+                <a:solidFill>
+                  <a:srgbClr val="C00000"/>
+                </a:solidFill>
+              </a:rPr>
+              <a:t>⛔ HISTORICAL — 인용 금지</a:t>
+            </a:r>
+          </a:p>
+          <a:p>
+            <a:pPr>
+              <a:spcAft>
+                <a:spcPts val="1000"/>
+              </a:spcAft>
+            </a:pPr>
+            <a:r>
+              <a:rPr sz="1700" b="0">
+                <a:solidFill>
+                  <a:srgbClr val="202020"/>
+                </a:solidFill>
+              </a:rPr>
+              <a:t>2026-08-06 발표본.  이 덱의 SDCP 전자·이온 이득 수치는 이후 **철회**됐다.</a:t>
+            </a:r>
+          </a:p>
+          <a:p>
+            <a:pPr>
+              <a:spcAft>
+                <a:spcPts val="1000"/>
+              </a:spcAft>
+            </a:pPr>
+            <a:r>
+              <a:rPr sz="1700" b="1">
+                <a:solidFill>
+                  <a:srgbClr val="202020"/>
+                </a:solidFill>
+              </a:rPr>
+              <a:t>정본 = docs/reviews/claims.json  (CL-24 · CL-33 · CL-41)</a:t>
+            </a:r>
+          </a:p>
+          <a:p>
+            <a:pPr>
+              <a:spcAft>
+                <a:spcPts val="1000"/>
+              </a:spcAft>
+            </a:pPr>
+            <a:r>
+              <a:rPr sz="1500" b="0">
+                <a:solidFill>
+                  <a:srgbClr val="404040"/>
+                </a:solidFill>
+              </a:rPr>
+              <a:t>격자(vox)를 조이면 전자 헤드라인이 계속 내려가고 이온 이득은 부호가 뒤집힌다.</a:t>
+            </a:r>
+          </a:p>
+          <a:p>
+            <a:pPr>
+              <a:spcAft>
+                <a:spcPts val="1000"/>
+              </a:spcAft>
+            </a:pPr>
+            <a:r>
+              <a:rPr sz="1500" b="0">
+                <a:solidFill>
+                  <a:srgbClr val="404040"/>
+                </a:solidFill>
+              </a:rPr>
+              <a:t>이 파일은 발표 이력 보존용이며, 어떤 수치도 현행 결론으로 쓰지 말 것.</a:t>
+            </a:r>
+          </a:p>
+        </p:txBody>
+      </p:sp>
+    </p:spTree>
+  </p:cSld>
+  <p:clrMapOvr>
+    <a:masterClrMapping/>
+  </p:clrMapOvr>
+</p:sld>
+</file>
+
 <file path=ppt/slides/slide3.xml><?xml version="1.0" encoding="utf-8"?>
 <p:sld xmlns:a="http://schemas.openxmlformats.org/drawingml/2006/main" xmlns:r="http://schemas.openxmlformats.org/officeDocument/2006/relationships" xmlns:p="http://schemas.openxmlformats.org/presentationml/2006/main">
   <p:cSld name="Slide 3">
